--- a/lecons/F5/56_F5_M3_FS05_The_Shanty_Settlements_Ghettos_Slums_in_the_World.pptx
+++ b/lecons/F5/56_F5_M3_FS05_The_Shanty_Settlements_Ghettos_Slums_in_the_World.pptx
@@ -12859,7 +12859,7 @@
         <p:spPr>
           <a:xfrm>
             <a:off x="0" y="658368"/>
-            <a:ext cx="3840480" cy="5833872"/>
+            <a:ext cx="5120640" cy="5833872"/>
           </a:xfrm>
           <a:prstGeom prst="rect">
             <a:avLst/>
@@ -12874,8 +12874,8 @@
         </p:nvSpPr>
         <p:spPr>
           <a:xfrm>
-            <a:off x="4069080" y="1005840"/>
-            <a:ext cx="7802575" cy="731520"/>
+            <a:off x="5349240" y="1005840"/>
+            <a:ext cx="6522415" cy="731520"/>
           </a:xfrm>
           <a:prstGeom prst="rect">
             <a:avLst/>
@@ -12915,8 +12915,8 @@
         </p:nvSpPr>
         <p:spPr>
           <a:xfrm>
-            <a:off x="4069080" y="1783080"/>
-            <a:ext cx="7802575" cy="4663440"/>
+            <a:off x="5349240" y="1783080"/>
+            <a:ext cx="6522415" cy="4663440"/>
           </a:xfrm>
           <a:prstGeom prst="rect">
             <a:avLst/>
@@ -12935,7 +12935,7 @@
               <a:buNone/>
             </a:pPr>
             <a:r>
-              <a:rPr lang="en-US" sz="4000" b="1" dirty="0">
+              <a:rPr lang="en-US" sz="3200" b="1" dirty="0">
                 <a:solidFill>
                   <a:srgbClr val="111111"/>
                 </a:solidFill>
@@ -12945,7 +12945,7 @@
               </a:rPr>
               <a:t>Topic: The Development of Settlements and their Implications</a:t>
             </a:r>
-            <a:endParaRPr lang="en-US" sz="4000" dirty="0"/>
+            <a:endParaRPr lang="en-US" sz="3200" dirty="0"/>
           </a:p>
           <a:p>
             <a:pPr algn="l" indent="0" marL="0">
@@ -12955,7 +12955,7 @@
               <a:buNone/>
             </a:pPr>
             <a:r>
-              <a:rPr lang="en-US" sz="4000" b="1" dirty="0">
+              <a:rPr lang="en-US" sz="3200" b="1" dirty="0">
                 <a:solidFill>
                   <a:srgbClr val="111111"/>
                 </a:solidFill>
@@ -12965,7 +12965,7 @@
               </a:rPr>
               <a:t>Sub-topic: Urban Settlements and their Spheres of Influence</a:t>
             </a:r>
-            <a:endParaRPr lang="en-US" sz="4000" dirty="0"/>
+            <a:endParaRPr lang="en-US" sz="3200" dirty="0"/>
           </a:p>
           <a:p>
             <a:pPr algn="l" indent="0" marL="0">
@@ -12975,7 +12975,7 @@
               <a:buNone/>
             </a:pPr>
             <a:r>
-              <a:rPr lang="en-US" sz="4000" b="1" dirty="0">
+              <a:rPr lang="en-US" sz="3200" b="1" dirty="0">
                 <a:solidFill>
                   <a:srgbClr val="990011"/>
                 </a:solidFill>
@@ -12985,7 +12985,7 @@
               </a:rPr>
               <a:t>Further Study 5: The Shanty Settlements (Ghettos/Slums) in the World</a:t>
             </a:r>
-            <a:endParaRPr lang="en-US" sz="4000" dirty="0"/>
+            <a:endParaRPr lang="en-US" sz="3200" dirty="0"/>
           </a:p>
         </p:txBody>
       </p:sp>

--- a/lecons/F5/56_F5_M3_FS05_The_Shanty_Settlements_Ghettos_Slums_in_the_World.pptx
+++ b/lecons/F5/56_F5_M3_FS05_The_Shanty_Settlements_Ghettos_Slums_in_the_World.pptx
@@ -55,9 +55,13 @@
     <p:sldId id="303" r:id="rId49"/>
     <p:sldId id="304" r:id="rId50"/>
     <p:sldId id="305" r:id="rId51"/>
+    <p:sldId id="306" r:id="rId52"/>
+    <p:sldId id="307" r:id="rId53"/>
+    <p:sldId id="308" r:id="rId54"/>
+    <p:sldId id="309" r:id="rId55"/>
   </p:sldIdLst>
   <p:notesMasterIdLst>
-    <p:notesMasterId r:id="rId52"/>
+    <p:notesMasterId r:id="rId56"/>
   </p:notesMasterIdLst>
   <p:sldSz cx="12192000" cy="6858000"/>
   <p:notesSz cx="6858000" cy="12192000"/>
@@ -3015,7 +3019,7 @@
           <a:p>
             <a:r>
               <a:rPr lang="en-US" dirty="0"/>
-              <a:t>Let us copy Shanty Settlements in Africa and in NICs. Shanty settlements in LICs and NICs are described as follows. On this slide we have Africa. Write each point on a new line, with the key term first, and explain it in your own words when we revise. When you finish, we go to the next slide.</a:t>
+              <a:t>Let us copy Examples. Shanty settlements in LICs and NICs have the following examples. On this slide we have Africa. Write each point on a new line, with the key term first, and explain it in your own words when we revise. When you finish, we go to the next slide.</a:t>
             </a:r>
             <a:endParaRPr lang="en-US" dirty="0"/>
           </a:p>
@@ -3103,7 +3107,7 @@
           <a:p>
             <a:r>
               <a:rPr lang="en-US" dirty="0"/>
-              <a:t>We continue with Shanty Settlements in Africa and in NICs. On this slide we have NICs and Attempted solutions. Write each point on a new line, with the key term first, and explain it in your own words when we revise.</a:t>
+              <a:t>We continue with Examples. On this slide we have NICs. Write each point on a new line, with the key term first, and explain it in your own words when we revise.</a:t>
             </a:r>
             <a:endParaRPr lang="en-US" dirty="0"/>
           </a:p>
@@ -3191,7 +3195,7 @@
           <a:p>
             <a:r>
               <a:rPr lang="en-US" dirty="0"/>
-              <a:t>Let us copy Ghettos and Slums in AICs. Ghettos in AICs are described as follows. On this slide we have Characteristics and Attempted solutions. Write each point on a new line, with the key term first, and explain it in your own words when we revise.</a:t>
+              <a:t>Let us copy Attempted Solutions. The following solutions are attempted. On this slide we have Slum upgrading and Site-and-service schemes. Write each point on a new line, with the key term first, and explain it in your own words when we revise. When you finish, we go to the next slide.</a:t>
             </a:r>
             <a:endParaRPr lang="en-US" dirty="0"/>
           </a:p>
@@ -3279,7 +3283,7 @@
           <a:p>
             <a:r>
               <a:rPr lang="en-US" dirty="0"/>
-              <a:t>Now draw this illustration in your notebook: urban renewal. Give it a title and label it clearly.</a:t>
+              <a:t>We continue with Attempted Solutions. On this slide we have Self-help housing. Write each point on a new line, with the key term first, and explain it in your own words when we revise.</a:t>
             </a:r>
             <a:endParaRPr lang="en-US" dirty="0"/>
           </a:p>
@@ -3367,7 +3371,7 @@
           <a:p>
             <a:r>
               <a:rPr lang="en-US" dirty="0"/>
-              <a:t>Now let us check what you have understood. Question 1: Define a shanty town. Answer in your exercise book.</a:t>
+              <a:t>Let us copy Characteristics. Ghettos in AICs have the following characteristics. On this slide we have Poor housing, Unemployment and Crime. Write each point on a new line, with the key term first, and explain it in your own words when we revise.</a:t>
             </a:r>
             <a:endParaRPr lang="en-US" dirty="0"/>
           </a:p>
@@ -3543,7 +3547,7 @@
           <a:p>
             <a:r>
               <a:rPr lang="en-US" dirty="0"/>
-              <a:t>The expected answer is: an unplanned settlement of poor self-built houses without services. If you got it right, well done.</a:t>
+              <a:t>Let us copy Attempted Solutions. The following solutions are attempted. On this slide we have Urban renewal and Social housing. Write each point on a new line, with the key term first, and explain it in your own words when we revise. When you finish, we go to the next slide.</a:t>
             </a:r>
             <a:endParaRPr lang="en-US" dirty="0"/>
           </a:p>
@@ -3631,7 +3635,7 @@
           <a:p>
             <a:r>
               <a:rPr lang="en-US" dirty="0"/>
-              <a:t>Now let us check what you have understood. Question 2: Give one example and one solution in an NIC. Answer in your exercise book.</a:t>
+              <a:t>We continue with Attempted Solutions. On this slide we have Job programmes. Write each point on a new line, with the key term first, and explain it in your own words when we revise.</a:t>
             </a:r>
             <a:endParaRPr lang="en-US" dirty="0"/>
           </a:p>
@@ -3719,7 +3723,7 @@
           <a:p>
             <a:r>
               <a:rPr lang="en-US" dirty="0"/>
-              <a:t>The expected answer is: the favelas of Rio; self-help housing. If you got it right, well done.</a:t>
+              <a:t>Now draw this illustration in your notebook: urban renewal. Give it a title and label it clearly.</a:t>
             </a:r>
             <a:endParaRPr lang="en-US" dirty="0"/>
           </a:p>
@@ -3807,7 +3811,7 @@
           <a:p>
             <a:r>
               <a:rPr lang="en-US" dirty="0"/>
-              <a:t>For those who need more practice, fill in the blanks in your exercise book. The answers are: number 1, favelas; number 2, Kibera; number 3, renewal.</a:t>
+              <a:t>Now let us check what you have understood. Question 1: Define a shanty town. Answer in your exercise book.</a:t>
             </a:r>
             <a:endParaRPr lang="en-US" dirty="0"/>
           </a:p>
@@ -3895,7 +3899,7 @@
           <a:p>
             <a:r>
               <a:rPr lang="en-US" dirty="0"/>
-              <a:t>For your homework: Describe a poor quarter in a town of Cameroon and propose two solutions. We shall correct it at the beginning of our next lesson.</a:t>
+              <a:t>The expected answer is: an unplanned settlement of poor self-built houses without services. If you got it right, well done.</a:t>
             </a:r>
             <a:endParaRPr lang="en-US" dirty="0"/>
           </a:p>
@@ -3983,7 +3987,7 @@
           <a:p>
             <a:r>
               <a:rPr lang="en-US" dirty="0"/>
-              <a:t>Our next lesson will be on Lesson 49: Functions of Urban Settlements. Thank you for your attention, and see you next time.</a:t>
+              <a:t>Now let us check what you have understood. Question 2: Give one example and one solution in an NIC. Answer in your exercise book.</a:t>
             </a:r>
             <a:endParaRPr lang="en-US" dirty="0"/>
           </a:p>
@@ -4071,7 +4075,7 @@
           <a:p>
             <a:r>
               <a:rPr lang="en-US" dirty="0"/>
-              <a:t>Let us play the bilingual game. I say a word in English, and you give me the French word. Then we do the reverse.</a:t>
+              <a:t>The expected answer is: the favelas of Rio; self-help housing. If you got it right, well done.</a:t>
             </a:r>
             <a:endParaRPr lang="en-US" dirty="0"/>
           </a:p>
@@ -4159,7 +4163,7 @@
           <a:p>
             <a:r>
               <a:rPr lang="en-US" dirty="0"/>
-              <a:t>I record this information in the official logbook of the class after the lesson.</a:t>
+              <a:t>For those who need more practice, fill in the blanks in your exercise book. The answers are: number 1, favelas; number 2, Kibera; number 3, renewal.</a:t>
             </a:r>
             <a:endParaRPr lang="en-US" dirty="0"/>
           </a:p>
@@ -4247,7 +4251,7 @@
           <a:p>
             <a:r>
               <a:rPr lang="en-US" dirty="0"/>
-              <a:t>I complete the second page of the logbook: the matter taught, the evaluation, the homework and the attendance.</a:t>
+              <a:t>For your homework: Describe a poor quarter in a town of Cameroon and propose two solutions. We shall correct it at the beginning of our next lesson.</a:t>
             </a:r>
             <a:endParaRPr lang="en-US" dirty="0"/>
           </a:p>
@@ -4335,7 +4339,7 @@
           <a:p>
             <a:r>
               <a:rPr lang="en-US" dirty="0"/>
-              <a:t>This slide is for me, the teacher: it gives the timing of the lesson and what to do if the projector is not available.</a:t>
+              <a:t>Our next lesson will be on Lesson 49: Functions of Urban Settlements. Thank you for your attention, and see you next time.</a:t>
             </a:r>
             <a:endParaRPr lang="en-US" dirty="0"/>
           </a:p>
@@ -4511,7 +4515,7 @@
           <a:p>
             <a:r>
               <a:rPr lang="en-US" dirty="0"/>
-              <a:t>These are the references and picture credits used to prepare this lesson.</a:t>
+              <a:t>Let us play the bilingual game. I say a word in English, and you give me the French word. Then we do the reverse.</a:t>
             </a:r>
             <a:endParaRPr lang="en-US" dirty="0"/>
           </a:p>
@@ -4535,6 +4539,358 @@
             <a:fld id="{F7021451-1387-4CA6-816F-3879F97B5CBC}" type="slidenum">
               <a:rPr lang="en-US"/>
               <a:t>50</a:t>
+            </a:fld>
+            <a:endParaRPr lang="en-US"/>
+          </a:p>
+        </p:txBody>
+      </p:sp>
+    </p:spTree>
+    <p:extLst>
+      <p:ext uri="{BB962C8B-B14F-4D97-AF65-F5344CB8AC3E}">
+        <p14:creationId xmlns:p14="http://schemas.microsoft.com/office/powerpoint/2010/main" val="1024086991"/>
+      </p:ext>
+    </p:extLst>
+  </p:cSld>
+  <p:clrMapOvr>
+    <a:masterClrMapping/>
+  </p:clrMapOvr>
+</p:notes>
+</file>
+
+<file path=ppt/notesSlides/notesSlide51.xml><?xml version="1.0" encoding="utf-8"?>
+<p:notes xmlns:a="http://schemas.openxmlformats.org/drawingml/2006/main" xmlns:r="http://schemas.openxmlformats.org/officeDocument/2006/relationships" xmlns:p="http://schemas.openxmlformats.org/presentationml/2006/main">
+  <p:cSld>
+    <p:spTree>
+      <p:nvGrpSpPr>
+        <p:cNvPr id="1" name=""/>
+        <p:cNvGrpSpPr/>
+        <p:nvPr/>
+      </p:nvGrpSpPr>
+      <p:grpSpPr>
+        <a:xfrm>
+          <a:off x="0" y="0"/>
+          <a:ext cx="0" cy="0"/>
+          <a:chOff x="0" y="0"/>
+          <a:chExt cx="0" cy="0"/>
+        </a:xfrm>
+      </p:grpSpPr>
+      <p:sp>
+        <p:nvSpPr>
+          <p:cNvPr id="2" name="Slide Image Placeholder 1"/>
+          <p:cNvSpPr>
+            <a:spLocks noGrp="1" noRot="1" noChangeAspect="1"/>
+          </p:cNvSpPr>
+          <p:nvPr>
+            <p:ph type="sldImg"/>
+          </p:nvPr>
+        </p:nvSpPr>
+        <p:spPr/>
+      </p:sp>
+      <p:sp>
+        <p:nvSpPr>
+          <p:cNvPr id="3" name="Notes Placeholder 2"/>
+          <p:cNvSpPr>
+            <a:spLocks noGrp="1"/>
+          </p:cNvSpPr>
+          <p:nvPr>
+            <p:ph type="body" idx="1"/>
+          </p:nvPr>
+        </p:nvSpPr>
+        <p:spPr/>
+        <p:txBody>
+          <a:bodyPr/>
+          <a:lstStyle/>
+          <a:p>
+            <a:r>
+              <a:rPr lang="en-US" dirty="0"/>
+              <a:t>I record this information in the official logbook of the class after the lesson.</a:t>
+            </a:r>
+            <a:endParaRPr lang="en-US" dirty="0"/>
+          </a:p>
+        </p:txBody>
+      </p:sp>
+      <p:sp>
+        <p:nvSpPr>
+          <p:cNvPr id="4" name="Slide Number Placeholder 3"/>
+          <p:cNvSpPr>
+            <a:spLocks noGrp="1"/>
+          </p:cNvSpPr>
+          <p:nvPr>
+            <p:ph type="sldNum" sz="quarter" idx="10"/>
+          </p:nvPr>
+        </p:nvSpPr>
+        <p:spPr/>
+        <p:txBody>
+          <a:bodyPr/>
+          <a:lstStyle/>
+          <a:p>
+            <a:fld id="{F7021451-1387-4CA6-816F-3879F97B5CBC}" type="slidenum">
+              <a:rPr lang="en-US"/>
+              <a:t>51</a:t>
+            </a:fld>
+            <a:endParaRPr lang="en-US"/>
+          </a:p>
+        </p:txBody>
+      </p:sp>
+    </p:spTree>
+    <p:extLst>
+      <p:ext uri="{BB962C8B-B14F-4D97-AF65-F5344CB8AC3E}">
+        <p14:creationId xmlns:p14="http://schemas.microsoft.com/office/powerpoint/2010/main" val="1024086991"/>
+      </p:ext>
+    </p:extLst>
+  </p:cSld>
+  <p:clrMapOvr>
+    <a:masterClrMapping/>
+  </p:clrMapOvr>
+</p:notes>
+</file>
+
+<file path=ppt/notesSlides/notesSlide52.xml><?xml version="1.0" encoding="utf-8"?>
+<p:notes xmlns:a="http://schemas.openxmlformats.org/drawingml/2006/main" xmlns:r="http://schemas.openxmlformats.org/officeDocument/2006/relationships" xmlns:p="http://schemas.openxmlformats.org/presentationml/2006/main">
+  <p:cSld>
+    <p:spTree>
+      <p:nvGrpSpPr>
+        <p:cNvPr id="1" name=""/>
+        <p:cNvGrpSpPr/>
+        <p:nvPr/>
+      </p:nvGrpSpPr>
+      <p:grpSpPr>
+        <a:xfrm>
+          <a:off x="0" y="0"/>
+          <a:ext cx="0" cy="0"/>
+          <a:chOff x="0" y="0"/>
+          <a:chExt cx="0" cy="0"/>
+        </a:xfrm>
+      </p:grpSpPr>
+      <p:sp>
+        <p:nvSpPr>
+          <p:cNvPr id="2" name="Slide Image Placeholder 1"/>
+          <p:cNvSpPr>
+            <a:spLocks noGrp="1" noRot="1" noChangeAspect="1"/>
+          </p:cNvSpPr>
+          <p:nvPr>
+            <p:ph type="sldImg"/>
+          </p:nvPr>
+        </p:nvSpPr>
+        <p:spPr/>
+      </p:sp>
+      <p:sp>
+        <p:nvSpPr>
+          <p:cNvPr id="3" name="Notes Placeholder 2"/>
+          <p:cNvSpPr>
+            <a:spLocks noGrp="1"/>
+          </p:cNvSpPr>
+          <p:nvPr>
+            <p:ph type="body" idx="1"/>
+          </p:nvPr>
+        </p:nvSpPr>
+        <p:spPr/>
+        <p:txBody>
+          <a:bodyPr/>
+          <a:lstStyle/>
+          <a:p>
+            <a:r>
+              <a:rPr lang="en-US" dirty="0"/>
+              <a:t>I complete the second page of the logbook: the matter taught, the evaluation, the homework and the attendance.</a:t>
+            </a:r>
+            <a:endParaRPr lang="en-US" dirty="0"/>
+          </a:p>
+        </p:txBody>
+      </p:sp>
+      <p:sp>
+        <p:nvSpPr>
+          <p:cNvPr id="4" name="Slide Number Placeholder 3"/>
+          <p:cNvSpPr>
+            <a:spLocks noGrp="1"/>
+          </p:cNvSpPr>
+          <p:nvPr>
+            <p:ph type="sldNum" sz="quarter" idx="10"/>
+          </p:nvPr>
+        </p:nvSpPr>
+        <p:spPr/>
+        <p:txBody>
+          <a:bodyPr/>
+          <a:lstStyle/>
+          <a:p>
+            <a:fld id="{F7021451-1387-4CA6-816F-3879F97B5CBC}" type="slidenum">
+              <a:rPr lang="en-US"/>
+              <a:t>52</a:t>
+            </a:fld>
+            <a:endParaRPr lang="en-US"/>
+          </a:p>
+        </p:txBody>
+      </p:sp>
+    </p:spTree>
+    <p:extLst>
+      <p:ext uri="{BB962C8B-B14F-4D97-AF65-F5344CB8AC3E}">
+        <p14:creationId xmlns:p14="http://schemas.microsoft.com/office/powerpoint/2010/main" val="1024086991"/>
+      </p:ext>
+    </p:extLst>
+  </p:cSld>
+  <p:clrMapOvr>
+    <a:masterClrMapping/>
+  </p:clrMapOvr>
+</p:notes>
+</file>
+
+<file path=ppt/notesSlides/notesSlide53.xml><?xml version="1.0" encoding="utf-8"?>
+<p:notes xmlns:a="http://schemas.openxmlformats.org/drawingml/2006/main" xmlns:r="http://schemas.openxmlformats.org/officeDocument/2006/relationships" xmlns:p="http://schemas.openxmlformats.org/presentationml/2006/main">
+  <p:cSld>
+    <p:spTree>
+      <p:nvGrpSpPr>
+        <p:cNvPr id="1" name=""/>
+        <p:cNvGrpSpPr/>
+        <p:nvPr/>
+      </p:nvGrpSpPr>
+      <p:grpSpPr>
+        <a:xfrm>
+          <a:off x="0" y="0"/>
+          <a:ext cx="0" cy="0"/>
+          <a:chOff x="0" y="0"/>
+          <a:chExt cx="0" cy="0"/>
+        </a:xfrm>
+      </p:grpSpPr>
+      <p:sp>
+        <p:nvSpPr>
+          <p:cNvPr id="2" name="Slide Image Placeholder 1"/>
+          <p:cNvSpPr>
+            <a:spLocks noGrp="1" noRot="1" noChangeAspect="1"/>
+          </p:cNvSpPr>
+          <p:nvPr>
+            <p:ph type="sldImg"/>
+          </p:nvPr>
+        </p:nvSpPr>
+        <p:spPr/>
+      </p:sp>
+      <p:sp>
+        <p:nvSpPr>
+          <p:cNvPr id="3" name="Notes Placeholder 2"/>
+          <p:cNvSpPr>
+            <a:spLocks noGrp="1"/>
+          </p:cNvSpPr>
+          <p:nvPr>
+            <p:ph type="body" idx="1"/>
+          </p:nvPr>
+        </p:nvSpPr>
+        <p:spPr/>
+        <p:txBody>
+          <a:bodyPr/>
+          <a:lstStyle/>
+          <a:p>
+            <a:r>
+              <a:rPr lang="en-US" dirty="0"/>
+              <a:t>This slide is for me, the teacher: it gives the timing of the lesson and what to do if the projector is not available.</a:t>
+            </a:r>
+            <a:endParaRPr lang="en-US" dirty="0"/>
+          </a:p>
+        </p:txBody>
+      </p:sp>
+      <p:sp>
+        <p:nvSpPr>
+          <p:cNvPr id="4" name="Slide Number Placeholder 3"/>
+          <p:cNvSpPr>
+            <a:spLocks noGrp="1"/>
+          </p:cNvSpPr>
+          <p:nvPr>
+            <p:ph type="sldNum" sz="quarter" idx="10"/>
+          </p:nvPr>
+        </p:nvSpPr>
+        <p:spPr/>
+        <p:txBody>
+          <a:bodyPr/>
+          <a:lstStyle/>
+          <a:p>
+            <a:fld id="{F7021451-1387-4CA6-816F-3879F97B5CBC}" type="slidenum">
+              <a:rPr lang="en-US"/>
+              <a:t>53</a:t>
+            </a:fld>
+            <a:endParaRPr lang="en-US"/>
+          </a:p>
+        </p:txBody>
+      </p:sp>
+    </p:spTree>
+    <p:extLst>
+      <p:ext uri="{BB962C8B-B14F-4D97-AF65-F5344CB8AC3E}">
+        <p14:creationId xmlns:p14="http://schemas.microsoft.com/office/powerpoint/2010/main" val="1024086991"/>
+      </p:ext>
+    </p:extLst>
+  </p:cSld>
+  <p:clrMapOvr>
+    <a:masterClrMapping/>
+  </p:clrMapOvr>
+</p:notes>
+</file>
+
+<file path=ppt/notesSlides/notesSlide54.xml><?xml version="1.0" encoding="utf-8"?>
+<p:notes xmlns:a="http://schemas.openxmlformats.org/drawingml/2006/main" xmlns:r="http://schemas.openxmlformats.org/officeDocument/2006/relationships" xmlns:p="http://schemas.openxmlformats.org/presentationml/2006/main">
+  <p:cSld>
+    <p:spTree>
+      <p:nvGrpSpPr>
+        <p:cNvPr id="1" name=""/>
+        <p:cNvGrpSpPr/>
+        <p:nvPr/>
+      </p:nvGrpSpPr>
+      <p:grpSpPr>
+        <a:xfrm>
+          <a:off x="0" y="0"/>
+          <a:ext cx="0" cy="0"/>
+          <a:chOff x="0" y="0"/>
+          <a:chExt cx="0" cy="0"/>
+        </a:xfrm>
+      </p:grpSpPr>
+      <p:sp>
+        <p:nvSpPr>
+          <p:cNvPr id="2" name="Slide Image Placeholder 1"/>
+          <p:cNvSpPr>
+            <a:spLocks noGrp="1" noRot="1" noChangeAspect="1"/>
+          </p:cNvSpPr>
+          <p:nvPr>
+            <p:ph type="sldImg"/>
+          </p:nvPr>
+        </p:nvSpPr>
+        <p:spPr/>
+      </p:sp>
+      <p:sp>
+        <p:nvSpPr>
+          <p:cNvPr id="3" name="Notes Placeholder 2"/>
+          <p:cNvSpPr>
+            <a:spLocks noGrp="1"/>
+          </p:cNvSpPr>
+          <p:nvPr>
+            <p:ph type="body" idx="1"/>
+          </p:nvPr>
+        </p:nvSpPr>
+        <p:spPr/>
+        <p:txBody>
+          <a:bodyPr/>
+          <a:lstStyle/>
+          <a:p>
+            <a:r>
+              <a:rPr lang="en-US" dirty="0"/>
+              <a:t>These are the references and picture credits used to prepare this lesson.</a:t>
+            </a:r>
+            <a:endParaRPr lang="en-US" dirty="0"/>
+          </a:p>
+        </p:txBody>
+      </p:sp>
+      <p:sp>
+        <p:nvSpPr>
+          <p:cNvPr id="4" name="Slide Number Placeholder 3"/>
+          <p:cNvSpPr>
+            <a:spLocks noGrp="1"/>
+          </p:cNvSpPr>
+          <p:nvPr>
+            <p:ph type="sldNum" sz="quarter" idx="10"/>
+          </p:nvPr>
+        </p:nvSpPr>
+        <p:spPr/>
+        <p:txBody>
+          <a:bodyPr/>
+          <a:lstStyle/>
+          <a:p>
+            <a:fld id="{F7021451-1387-4CA6-816F-3879F97B5CBC}" type="slidenum">
+              <a:rPr lang="en-US"/>
+              <a:t>54</a:t>
             </a:fld>
             <a:endParaRPr lang="en-US"/>
           </a:p>
@@ -13374,7 +13730,7 @@
         <p:spPr>
           <a:xfrm>
             <a:off x="0" y="658368"/>
-            <a:ext cx="5120640" cy="5833872"/>
+            <a:ext cx="3840480" cy="5833872"/>
           </a:xfrm>
           <a:prstGeom prst="rect">
             <a:avLst/>
@@ -13389,8 +13745,8 @@
         </p:nvSpPr>
         <p:spPr>
           <a:xfrm>
-            <a:off x="5349240" y="1005840"/>
-            <a:ext cx="6522415" cy="731520"/>
+            <a:off x="4069080" y="1005840"/>
+            <a:ext cx="7802575" cy="731520"/>
           </a:xfrm>
           <a:prstGeom prst="rect">
             <a:avLst/>
@@ -13430,8 +13786,47 @@
         </p:nvSpPr>
         <p:spPr>
           <a:xfrm>
-            <a:off x="5349240" y="1783080"/>
-            <a:ext cx="6522415" cy="4663440"/>
+            <a:off x="4069080" y="1737360"/>
+            <a:ext cx="7802575" cy="457200"/>
+          </a:xfrm>
+          <a:prstGeom prst="rect">
+            <a:avLst/>
+          </a:prstGeom>
+          <a:noFill/>
+          <a:ln/>
+        </p:spPr>
+        <p:txBody>
+          <a:bodyPr wrap="square" lIns="0" tIns="0" rIns="0" bIns="0" rtlCol="0" anchor="ctr"/>
+          <a:lstStyle/>
+          <a:p>
+            <a:pPr algn="l" indent="0" marL="0">
+              <a:buNone/>
+            </a:pPr>
+            <a:r>
+              <a:rPr lang="en-US" sz="3200" b="1" dirty="0">
+                <a:solidFill>
+                  <a:srgbClr val="990011"/>
+                </a:solidFill>
+                <a:latin typeface="Times New Roman" pitchFamily="34" charset="0"/>
+                <a:ea typeface="Times New Roman" pitchFamily="34" charset="-122"/>
+                <a:cs typeface="Times New Roman" pitchFamily="34" charset="-120"/>
+              </a:rPr>
+              <a:t>A) Examples</a:t>
+            </a:r>
+            <a:endParaRPr lang="en-US" sz="3200" dirty="0"/>
+          </a:p>
+        </p:txBody>
+      </p:sp>
+      <p:sp>
+        <p:nvSpPr>
+          <p:cNvPr id="6" name="Text 3"/>
+          <p:cNvSpPr/>
+          <p:nvPr/>
+        </p:nvSpPr>
+        <p:spPr>
+          <a:xfrm>
+            <a:off x="4069080" y="2240280"/>
+            <a:ext cx="7802575" cy="4206240"/>
           </a:xfrm>
           <a:prstGeom prst="rect">
             <a:avLst/>
@@ -13458,7 +13853,7 @@
                 <a:ea typeface="Times New Roman" pitchFamily="34" charset="-122"/>
                 <a:cs typeface="Times New Roman" pitchFamily="34" charset="-120"/>
               </a:rPr>
-              <a:t>Shanty settlements in LICs and NICs are described as follows:</a:t>
+              <a:t>Shanty settlements in LICs and NICs have the following examples:</a:t>
             </a:r>
             <a:endParaRPr lang="en-US" sz="4000" dirty="0"/>
           </a:p>
@@ -13630,7 +14025,7 @@
         <p:spPr>
           <a:xfrm>
             <a:off x="0" y="658368"/>
-            <a:ext cx="3840480" cy="5833872"/>
+            <a:ext cx="5120640" cy="5833872"/>
           </a:xfrm>
           <a:prstGeom prst="rect">
             <a:avLst/>
@@ -13645,8 +14040,8 @@
         </p:nvSpPr>
         <p:spPr>
           <a:xfrm>
-            <a:off x="4069080" y="1005840"/>
-            <a:ext cx="7802575" cy="731520"/>
+            <a:off x="5349240" y="1005840"/>
+            <a:ext cx="6522415" cy="731520"/>
           </a:xfrm>
           <a:prstGeom prst="rect">
             <a:avLst/>
@@ -13672,7 +14067,7 @@
                 <a:ea typeface="Times New Roman" pitchFamily="34" charset="-122"/>
                 <a:cs typeface="Times New Roman" pitchFamily="34" charset="-120"/>
               </a:rPr>
-              <a:t>1. Shanty Settlements in Africa and in NICs (continued)</a:t>
+              <a:t>1. Shanty Settlements in Africa and in NICs</a:t>
             </a:r>
             <a:endParaRPr lang="en-US" sz="3600" dirty="0"/>
           </a:p>
@@ -13686,8 +14081,47 @@
         </p:nvSpPr>
         <p:spPr>
           <a:xfrm>
-            <a:off x="4069080" y="1783080"/>
-            <a:ext cx="7802575" cy="4663440"/>
+            <a:off x="5349240" y="1737360"/>
+            <a:ext cx="6522415" cy="457200"/>
+          </a:xfrm>
+          <a:prstGeom prst="rect">
+            <a:avLst/>
+          </a:prstGeom>
+          <a:noFill/>
+          <a:ln/>
+        </p:spPr>
+        <p:txBody>
+          <a:bodyPr wrap="square" lIns="0" tIns="0" rIns="0" bIns="0" rtlCol="0" anchor="ctr"/>
+          <a:lstStyle/>
+          <a:p>
+            <a:pPr algn="l" indent="0" marL="0">
+              <a:buNone/>
+            </a:pPr>
+            <a:r>
+              <a:rPr lang="en-US" sz="3200" b="1" dirty="0">
+                <a:solidFill>
+                  <a:srgbClr val="990011"/>
+                </a:solidFill>
+                <a:latin typeface="Times New Roman" pitchFamily="34" charset="0"/>
+                <a:ea typeface="Times New Roman" pitchFamily="34" charset="-122"/>
+                <a:cs typeface="Times New Roman" pitchFamily="34" charset="-120"/>
+              </a:rPr>
+              <a:t>A) Examples (continued)</a:t>
+            </a:r>
+            <a:endParaRPr lang="en-US" sz="3200" dirty="0"/>
+          </a:p>
+        </p:txBody>
+      </p:sp>
+      <p:sp>
+        <p:nvSpPr>
+          <p:cNvPr id="6" name="Text 3"/>
+          <p:cNvSpPr/>
+          <p:nvPr/>
+        </p:nvSpPr>
+        <p:spPr>
+          <a:xfrm>
+            <a:off x="5349240" y="2240280"/>
+            <a:ext cx="6522415" cy="4206240"/>
           </a:xfrm>
           <a:prstGeom prst="rect">
             <a:avLst/>
@@ -13732,43 +14166,6 @@
                 <a:cs typeface="Times New Roman" pitchFamily="34" charset="-120"/>
               </a:rPr>
               <a:t>The favelas of Rio de Janeiro and the slums of Mumbai are crowded on hills and swamps.</a:t>
-            </a:r>
-            <a:endParaRPr lang="en-US" sz="4000" dirty="0"/>
-          </a:p>
-          <a:p>
-            <a:pPr algn="l" indent="0" marL="0">
-              <a:spcAft>
-                <a:spcPts val="800"/>
-              </a:spcAft>
-              <a:buNone/>
-            </a:pPr>
-            <a:r>
-              <a:rPr lang="en-US" sz="4000" b="1" dirty="0">
-                <a:solidFill>
-                  <a:srgbClr val="111111"/>
-                </a:solidFill>
-                <a:latin typeface="Times New Roman" pitchFamily="34" charset="0"/>
-                <a:ea typeface="Times New Roman" pitchFamily="34" charset="-122"/>
-                <a:cs typeface="Times New Roman" pitchFamily="34" charset="-120"/>
-              </a:rPr>
-              <a:t>Attempted solutions: </a:t>
-            </a:r>
-            <a:pPr algn="l" indent="0" marL="0">
-              <a:spcAft>
-                <a:spcPts val="800"/>
-              </a:spcAft>
-              <a:buNone/>
-            </a:pPr>
-            <a:r>
-              <a:rPr lang="en-US" sz="4000" dirty="0">
-                <a:solidFill>
-                  <a:srgbClr val="111111"/>
-                </a:solidFill>
-                <a:latin typeface="Times New Roman" pitchFamily="34" charset="0"/>
-                <a:ea typeface="Times New Roman" pitchFamily="34" charset="-122"/>
-                <a:cs typeface="Times New Roman" pitchFamily="34" charset="-120"/>
-              </a:rPr>
-              <a:t>Slum upgrading, site-and-service schemes and self-help housing are used.</a:t>
             </a:r>
             <a:endParaRPr lang="en-US" sz="4000" dirty="0"/>
           </a:p>
@@ -13903,7 +14300,7 @@
         <p:spPr>
           <a:xfrm>
             <a:off x="0" y="658368"/>
-            <a:ext cx="1463040" cy="5833872"/>
+            <a:ext cx="2468880" cy="5833872"/>
           </a:xfrm>
           <a:prstGeom prst="rect">
             <a:avLst/>
@@ -13918,8 +14315,8 @@
         </p:nvSpPr>
         <p:spPr>
           <a:xfrm>
-            <a:off x="1691640" y="1005840"/>
-            <a:ext cx="10180015" cy="731520"/>
+            <a:off x="2697480" y="1005840"/>
+            <a:ext cx="9174175" cy="731520"/>
           </a:xfrm>
           <a:prstGeom prst="rect">
             <a:avLst/>
@@ -13945,7 +14342,7 @@
                 <a:ea typeface="Times New Roman" pitchFamily="34" charset="-122"/>
                 <a:cs typeface="Times New Roman" pitchFamily="34" charset="-120"/>
               </a:rPr>
-              <a:t>2. Ghettos and Slums in AICs</a:t>
+              <a:t>1. Shanty Settlements in Africa and in NICs</a:t>
             </a:r>
             <a:endParaRPr lang="en-US" sz="3600" dirty="0"/>
           </a:p>
@@ -13959,8 +14356,47 @@
         </p:nvSpPr>
         <p:spPr>
           <a:xfrm>
-            <a:off x="1691640" y="1783080"/>
-            <a:ext cx="10180015" cy="4663440"/>
+            <a:off x="2697480" y="1737360"/>
+            <a:ext cx="9174175" cy="457200"/>
+          </a:xfrm>
+          <a:prstGeom prst="rect">
+            <a:avLst/>
+          </a:prstGeom>
+          <a:noFill/>
+          <a:ln/>
+        </p:spPr>
+        <p:txBody>
+          <a:bodyPr wrap="square" lIns="0" tIns="0" rIns="0" bIns="0" rtlCol="0" anchor="ctr"/>
+          <a:lstStyle/>
+          <a:p>
+            <a:pPr algn="l" indent="0" marL="0">
+              <a:buNone/>
+            </a:pPr>
+            <a:r>
+              <a:rPr lang="en-US" sz="3200" b="1" dirty="0">
+                <a:solidFill>
+                  <a:srgbClr val="990011"/>
+                </a:solidFill>
+                <a:latin typeface="Times New Roman" pitchFamily="34" charset="0"/>
+                <a:ea typeface="Times New Roman" pitchFamily="34" charset="-122"/>
+                <a:cs typeface="Times New Roman" pitchFamily="34" charset="-120"/>
+              </a:rPr>
+              <a:t>B) Attempted Solutions</a:t>
+            </a:r>
+            <a:endParaRPr lang="en-US" sz="3200" dirty="0"/>
+          </a:p>
+        </p:txBody>
+      </p:sp>
+      <p:sp>
+        <p:nvSpPr>
+          <p:cNvPr id="6" name="Text 3"/>
+          <p:cNvSpPr/>
+          <p:nvPr/>
+        </p:nvSpPr>
+        <p:spPr>
+          <a:xfrm>
+            <a:off x="2697480" y="2240280"/>
+            <a:ext cx="9174175" cy="4206240"/>
           </a:xfrm>
           <a:prstGeom prst="rect">
             <a:avLst/>
@@ -13987,7 +14423,7 @@
                 <a:ea typeface="Times New Roman" pitchFamily="34" charset="-122"/>
                 <a:cs typeface="Times New Roman" pitchFamily="34" charset="-120"/>
               </a:rPr>
-              <a:t>Ghettos in AICs are described as follows:</a:t>
+              <a:t>The following solutions are attempted:</a:t>
             </a:r>
             <a:endParaRPr lang="en-US" sz="4000" dirty="0"/>
           </a:p>
@@ -14007,7 +14443,7 @@
                 <a:ea typeface="Times New Roman" pitchFamily="34" charset="-122"/>
                 <a:cs typeface="Times New Roman" pitchFamily="34" charset="-120"/>
               </a:rPr>
-              <a:t>Characteristics: </a:t>
+              <a:t>Slum upgrading: </a:t>
             </a:r>
             <a:pPr algn="l" indent="0" marL="0">
               <a:spcAft>
@@ -14024,7 +14460,7 @@
                 <a:ea typeface="Times New Roman" pitchFamily="34" charset="-122"/>
                 <a:cs typeface="Times New Roman" pitchFamily="34" charset="-120"/>
               </a:rPr>
-              <a:t>They are old inner-city areas with poor housing, unemployment and crime.</a:t>
+              <a:t>Water, roads and toilets are added to existing slums.</a:t>
             </a:r>
             <a:endParaRPr lang="en-US" sz="4000" dirty="0"/>
           </a:p>
@@ -14044,7 +14480,7 @@
                 <a:ea typeface="Times New Roman" pitchFamily="34" charset="-122"/>
                 <a:cs typeface="Times New Roman" pitchFamily="34" charset="-120"/>
               </a:rPr>
-              <a:t>Attempted solutions: </a:t>
+              <a:t>Site-and-service schemes: </a:t>
             </a:r>
             <a:pPr algn="l" indent="0" marL="0">
               <a:spcAft>
@@ -14061,7 +14497,7 @@
                 <a:ea typeface="Times New Roman" pitchFamily="34" charset="-122"/>
                 <a:cs typeface="Times New Roman" pitchFamily="34" charset="-120"/>
               </a:rPr>
-              <a:t>Urban renewal, social housing and job programmes are used.</a:t>
+              <a:t>Plots with water and roads are given to poor families.</a:t>
             </a:r>
             <a:endParaRPr lang="en-US" sz="4000" dirty="0"/>
           </a:p>
@@ -14179,48 +14615,9 @@
           </a:p>
         </p:txBody>
       </p:sp>
-      <p:sp>
-        <p:nvSpPr>
-          <p:cNvPr id="3" name="Text 1"/>
-          <p:cNvSpPr/>
-          <p:nvPr/>
-        </p:nvSpPr>
-        <p:spPr>
-          <a:xfrm>
-            <a:off x="457200" y="1005840"/>
-            <a:ext cx="11277295" cy="731520"/>
-          </a:xfrm>
-          <a:prstGeom prst="rect">
-            <a:avLst/>
-          </a:prstGeom>
-          <a:noFill/>
-          <a:ln/>
-        </p:spPr>
-        <p:txBody>
-          <a:bodyPr wrap="square" lIns="0" tIns="0" rIns="0" bIns="0" rtlCol="0" anchor="ctr"/>
-          <a:lstStyle/>
-          <a:p>
-            <a:pPr algn="ctr" indent="0" marL="0">
-              <a:buNone/>
-            </a:pPr>
-            <a:r>
-              <a:rPr lang="en-US" sz="3600" b="1" dirty="0">
-                <a:solidFill>
-                  <a:srgbClr val="990011"/>
-                </a:solidFill>
-                <a:latin typeface="Times New Roman" pitchFamily="34" charset="0"/>
-                <a:ea typeface="Times New Roman" pitchFamily="34" charset="-122"/>
-                <a:cs typeface="Times New Roman" pitchFamily="34" charset="-120"/>
-              </a:rPr>
-              <a:t>2. Ghettos and Slums in AICs</a:t>
-            </a:r>
-            <a:endParaRPr lang="en-US" sz="3600" dirty="0"/>
-          </a:p>
-        </p:txBody>
-      </p:sp>
       <p:pic>
         <p:nvPicPr>
-          <p:cNvPr id="4" name="Image 0" descr="/home/claude/f4/img/v2/renewal_big.png">    </p:cNvPr>
+          <p:cNvPr id="3" name="Image 0" descr="/home/claude/f4/img/minesec_sheet.png">    </p:cNvPr>
           <p:cNvPicPr>
             <a:picLocks noChangeAspect="1"/>
           </p:cNvPicPr>
@@ -14234,8 +14631,8 @@
         </p:blipFill>
         <p:spPr>
           <a:xfrm>
-            <a:off x="629930" y="1783080"/>
-            <a:ext cx="10931835" cy="4270248"/>
+            <a:off x="0" y="658368"/>
+            <a:ext cx="5120640" cy="5833872"/>
           </a:xfrm>
           <a:prstGeom prst="rect">
             <a:avLst/>
@@ -14244,14 +14641,14 @@
       </p:pic>
       <p:sp>
         <p:nvSpPr>
-          <p:cNvPr id="5" name="Text 2"/>
+          <p:cNvPr id="4" name="Text 1"/>
           <p:cNvSpPr/>
           <p:nvPr/>
         </p:nvSpPr>
         <p:spPr>
           <a:xfrm>
-            <a:off x="457200" y="6089904"/>
-            <a:ext cx="11277295" cy="347472"/>
+            <a:off x="5349240" y="1005840"/>
+            <a:ext cx="6522415" cy="731520"/>
           </a:xfrm>
           <a:prstGeom prst="rect">
             <a:avLst/>
@@ -14260,24 +14657,124 @@
           <a:ln/>
         </p:spPr>
         <p:txBody>
-          <a:bodyPr wrap="square" lIns="0" tIns="0" rIns="0" bIns="0" rtlCol="0" anchor="ctr"/>
+          <a:bodyPr wrap="square" lIns="0" tIns="0" rIns="0" bIns="0" rtlCol="0" anchor="ctr">
+            <a:normAutofit/>
+          </a:bodyPr>
           <a:lstStyle/>
           <a:p>
             <a:pPr algn="ctr" indent="0" marL="0">
               <a:buNone/>
             </a:pPr>
             <a:r>
-              <a:rPr lang="en-US" sz="1800" i="1" dirty="0">
-                <a:solidFill>
-                  <a:srgbClr val="555555"/>
+              <a:rPr lang="en-US" sz="3600" b="1" dirty="0">
+                <a:solidFill>
+                  <a:srgbClr val="990011"/>
                 </a:solidFill>
                 <a:latin typeface="Times New Roman" pitchFamily="34" charset="0"/>
                 <a:ea typeface="Times New Roman" pitchFamily="34" charset="-122"/>
                 <a:cs typeface="Times New Roman" pitchFamily="34" charset="-120"/>
               </a:rPr>
-              <a:t>Illustration: urban renewal</a:t>
-            </a:r>
-            <a:endParaRPr lang="en-US" sz="1800" dirty="0"/>
+              <a:t>1. Shanty Settlements in Africa and in NICs</a:t>
+            </a:r>
+            <a:endParaRPr lang="en-US" sz="3600" dirty="0"/>
+          </a:p>
+        </p:txBody>
+      </p:sp>
+      <p:sp>
+        <p:nvSpPr>
+          <p:cNvPr id="5" name="Text 2"/>
+          <p:cNvSpPr/>
+          <p:nvPr/>
+        </p:nvSpPr>
+        <p:spPr>
+          <a:xfrm>
+            <a:off x="5349240" y="1737360"/>
+            <a:ext cx="6522415" cy="457200"/>
+          </a:xfrm>
+          <a:prstGeom prst="rect">
+            <a:avLst/>
+          </a:prstGeom>
+          <a:noFill/>
+          <a:ln/>
+        </p:spPr>
+        <p:txBody>
+          <a:bodyPr wrap="square" lIns="0" tIns="0" rIns="0" bIns="0" rtlCol="0" anchor="ctr"/>
+          <a:lstStyle/>
+          <a:p>
+            <a:pPr algn="l" indent="0" marL="0">
+              <a:buNone/>
+            </a:pPr>
+            <a:r>
+              <a:rPr lang="en-US" sz="3000" b="1" dirty="0">
+                <a:solidFill>
+                  <a:srgbClr val="990011"/>
+                </a:solidFill>
+                <a:latin typeface="Times New Roman" pitchFamily="34" charset="0"/>
+                <a:ea typeface="Times New Roman" pitchFamily="34" charset="-122"/>
+                <a:cs typeface="Times New Roman" pitchFamily="34" charset="-120"/>
+              </a:rPr>
+              <a:t>B) Attempted Solutions (continued)</a:t>
+            </a:r>
+            <a:endParaRPr lang="en-US" sz="3000" dirty="0"/>
+          </a:p>
+        </p:txBody>
+      </p:sp>
+      <p:sp>
+        <p:nvSpPr>
+          <p:cNvPr id="6" name="Text 3"/>
+          <p:cNvSpPr/>
+          <p:nvPr/>
+        </p:nvSpPr>
+        <p:spPr>
+          <a:xfrm>
+            <a:off x="5349240" y="2240280"/>
+            <a:ext cx="6522415" cy="4206240"/>
+          </a:xfrm>
+          <a:prstGeom prst="rect">
+            <a:avLst/>
+          </a:prstGeom>
+          <a:noFill/>
+          <a:ln/>
+        </p:spPr>
+        <p:txBody>
+          <a:bodyPr wrap="square" lIns="0" tIns="0" rIns="0" bIns="0" rtlCol="0" anchor="t"/>
+          <a:lstStyle/>
+          <a:p>
+            <a:pPr algn="l" indent="0" marL="0">
+              <a:spcAft>
+                <a:spcPts val="800"/>
+              </a:spcAft>
+              <a:buNone/>
+            </a:pPr>
+            <a:r>
+              <a:rPr lang="en-US" sz="4000" b="1" dirty="0">
+                <a:solidFill>
+                  <a:srgbClr val="111111"/>
+                </a:solidFill>
+                <a:latin typeface="Times New Roman" pitchFamily="34" charset="0"/>
+                <a:ea typeface="Times New Roman" pitchFamily="34" charset="-122"/>
+                <a:cs typeface="Times New Roman" pitchFamily="34" charset="-120"/>
+              </a:rPr>
+              <a:t>Self-help housing: </a:t>
+            </a:r>
+            <a:pPr algn="l" indent="0" marL="0">
+              <a:spcAft>
+                <a:spcPts val="800"/>
+              </a:spcAft>
+              <a:buNone/>
+            </a:pPr>
+            <a:r>
+              <a:rPr lang="en-US" sz="4000" dirty="0">
+                <a:solidFill>
+                  <a:srgbClr val="111111"/>
+                </a:solidFill>
+                <a:latin typeface="Times New Roman" pitchFamily="34" charset="0"/>
+                <a:ea typeface="Times New Roman" pitchFamily="34" charset="-122"/>
+                <a:cs typeface="Times New Roman" pitchFamily="34" charset="-120"/>
+              </a:rPr>
+              <a:t>People build their own houses with cheap materials.</a:t>
+            </a:r>
+            <a:endParaRPr lang="en-US" sz="4000" dirty="0"/>
           </a:p>
         </p:txBody>
       </p:sp>
@@ -14387,7 +14884,7 @@
                 <a:ea typeface="Calibri" pitchFamily="34" charset="-122"/>
                 <a:cs typeface="Calibri" pitchFamily="34" charset="-120"/>
               </a:rPr>
-              <a:t>FORMATIVE EVALUATION</a:t>
+              <a:t>BOARD SUMMARY</a:t>
             </a:r>
             <a:endParaRPr lang="en-US" sz="1400" dirty="0"/>
           </a:p>
@@ -14410,7 +14907,7 @@
         <p:spPr>
           <a:xfrm>
             <a:off x="0" y="658368"/>
-            <a:ext cx="5120640" cy="5833872"/>
+            <a:ext cx="2468880" cy="5833872"/>
           </a:xfrm>
           <a:prstGeom prst="rect">
             <a:avLst/>
@@ -14425,8 +14922,8 @@
         </p:nvSpPr>
         <p:spPr>
           <a:xfrm>
-            <a:off x="5349240" y="1005840"/>
-            <a:ext cx="6522415" cy="731520"/>
+            <a:off x="2697480" y="1005840"/>
+            <a:ext cx="9174175" cy="731520"/>
           </a:xfrm>
           <a:prstGeom prst="rect">
             <a:avLst/>
@@ -14452,7 +14949,7 @@
                 <a:ea typeface="Times New Roman" pitchFamily="34" charset="-122"/>
                 <a:cs typeface="Times New Roman" pitchFamily="34" charset="-120"/>
               </a:rPr>
-              <a:t>Evaluation 1</a:t>
+              <a:t>2. Ghettos and Slums in AICs</a:t>
             </a:r>
             <a:endParaRPr lang="en-US" sz="3600" dirty="0"/>
           </a:p>
@@ -14466,8 +14963,47 @@
         </p:nvSpPr>
         <p:spPr>
           <a:xfrm>
-            <a:off x="5349240" y="1783080"/>
-            <a:ext cx="6522415" cy="4663440"/>
+            <a:off x="2697480" y="1737360"/>
+            <a:ext cx="9174175" cy="457200"/>
+          </a:xfrm>
+          <a:prstGeom prst="rect">
+            <a:avLst/>
+          </a:prstGeom>
+          <a:noFill/>
+          <a:ln/>
+        </p:spPr>
+        <p:txBody>
+          <a:bodyPr wrap="square" lIns="0" tIns="0" rIns="0" bIns="0" rtlCol="0" anchor="ctr"/>
+          <a:lstStyle/>
+          <a:p>
+            <a:pPr algn="l" indent="0" marL="0">
+              <a:buNone/>
+            </a:pPr>
+            <a:r>
+              <a:rPr lang="en-US" sz="3200" b="1" dirty="0">
+                <a:solidFill>
+                  <a:srgbClr val="990011"/>
+                </a:solidFill>
+                <a:latin typeface="Times New Roman" pitchFamily="34" charset="0"/>
+                <a:ea typeface="Times New Roman" pitchFamily="34" charset="-122"/>
+                <a:cs typeface="Times New Roman" pitchFamily="34" charset="-120"/>
+              </a:rPr>
+              <a:t>A) Characteristics</a:t>
+            </a:r>
+            <a:endParaRPr lang="en-US" sz="3200" dirty="0"/>
+          </a:p>
+        </p:txBody>
+      </p:sp>
+      <p:sp>
+        <p:nvSpPr>
+          <p:cNvPr id="6" name="Text 3"/>
+          <p:cNvSpPr/>
+          <p:nvPr/>
+        </p:nvSpPr>
+        <p:spPr>
+          <a:xfrm>
+            <a:off x="2697480" y="2240280"/>
+            <a:ext cx="9174175" cy="4206240"/>
           </a:xfrm>
           <a:prstGeom prst="rect">
             <a:avLst/>
@@ -14486,7 +15022,7 @@
               <a:buNone/>
             </a:pPr>
             <a:r>
-              <a:rPr lang="en-US" sz="4000" dirty="0">
+              <a:rPr lang="en-US" sz="4000" i="1" dirty="0">
                 <a:solidFill>
                   <a:srgbClr val="111111"/>
                 </a:solidFill>
@@ -14494,7 +15030,118 @@
                 <a:ea typeface="Times New Roman" pitchFamily="34" charset="-122"/>
                 <a:cs typeface="Times New Roman" pitchFamily="34" charset="-120"/>
               </a:rPr>
-              <a:t>Define a shanty town.</a:t>
+              <a:t>Ghettos in AICs have the following characteristics:</a:t>
+            </a:r>
+            <a:endParaRPr lang="en-US" sz="4000" dirty="0"/>
+          </a:p>
+          <a:p>
+            <a:pPr algn="l" indent="0" marL="0">
+              <a:spcAft>
+                <a:spcPts val="800"/>
+              </a:spcAft>
+              <a:buNone/>
+            </a:pPr>
+            <a:r>
+              <a:rPr lang="en-US" sz="4000" b="1" dirty="0">
+                <a:solidFill>
+                  <a:srgbClr val="111111"/>
+                </a:solidFill>
+                <a:latin typeface="Times New Roman" pitchFamily="34" charset="0"/>
+                <a:ea typeface="Times New Roman" pitchFamily="34" charset="-122"/>
+                <a:cs typeface="Times New Roman" pitchFamily="34" charset="-120"/>
+              </a:rPr>
+              <a:t>Poor housing: </a:t>
+            </a:r>
+            <a:pPr algn="l" indent="0" marL="0">
+              <a:spcAft>
+                <a:spcPts val="800"/>
+              </a:spcAft>
+              <a:buNone/>
+            </a:pPr>
+            <a:r>
+              <a:rPr lang="en-US" sz="4000" dirty="0">
+                <a:solidFill>
+                  <a:srgbClr val="111111"/>
+                </a:solidFill>
+                <a:latin typeface="Times New Roman" pitchFamily="34" charset="0"/>
+                <a:ea typeface="Times New Roman" pitchFamily="34" charset="-122"/>
+                <a:cs typeface="Times New Roman" pitchFamily="34" charset="-120"/>
+              </a:rPr>
+              <a:t>Old houses in the inner city are in bad condition.</a:t>
+            </a:r>
+            <a:endParaRPr lang="en-US" sz="4000" dirty="0"/>
+          </a:p>
+          <a:p>
+            <a:pPr algn="l" indent="0" marL="0">
+              <a:spcAft>
+                <a:spcPts val="800"/>
+              </a:spcAft>
+              <a:buNone/>
+            </a:pPr>
+            <a:r>
+              <a:rPr lang="en-US" sz="4000" b="1" dirty="0">
+                <a:solidFill>
+                  <a:srgbClr val="111111"/>
+                </a:solidFill>
+                <a:latin typeface="Times New Roman" pitchFamily="34" charset="0"/>
+                <a:ea typeface="Times New Roman" pitchFamily="34" charset="-122"/>
+                <a:cs typeface="Times New Roman" pitchFamily="34" charset="-120"/>
+              </a:rPr>
+              <a:t>Unemployment: </a:t>
+            </a:r>
+            <a:pPr algn="l" indent="0" marL="0">
+              <a:spcAft>
+                <a:spcPts val="800"/>
+              </a:spcAft>
+              <a:buNone/>
+            </a:pPr>
+            <a:r>
+              <a:rPr lang="en-US" sz="4000" dirty="0">
+                <a:solidFill>
+                  <a:srgbClr val="111111"/>
+                </a:solidFill>
+                <a:latin typeface="Times New Roman" pitchFamily="34" charset="0"/>
+                <a:ea typeface="Times New Roman" pitchFamily="34" charset="-122"/>
+                <a:cs typeface="Times New Roman" pitchFamily="34" charset="-120"/>
+              </a:rPr>
+              <a:t>Many people have no job.</a:t>
+            </a:r>
+            <a:endParaRPr lang="en-US" sz="4000" dirty="0"/>
+          </a:p>
+          <a:p>
+            <a:pPr algn="l" indent="0" marL="0">
+              <a:spcAft>
+                <a:spcPts val="800"/>
+              </a:spcAft>
+              <a:buNone/>
+            </a:pPr>
+            <a:r>
+              <a:rPr lang="en-US" sz="4000" b="1" dirty="0">
+                <a:solidFill>
+                  <a:srgbClr val="111111"/>
+                </a:solidFill>
+                <a:latin typeface="Times New Roman" pitchFamily="34" charset="0"/>
+                <a:ea typeface="Times New Roman" pitchFamily="34" charset="-122"/>
+                <a:cs typeface="Times New Roman" pitchFamily="34" charset="-120"/>
+              </a:rPr>
+              <a:t>Crime: </a:t>
+            </a:r>
+            <a:pPr algn="l" indent="0" marL="0">
+              <a:spcAft>
+                <a:spcPts val="800"/>
+              </a:spcAft>
+              <a:buNone/>
+            </a:pPr>
+            <a:r>
+              <a:rPr lang="en-US" sz="4000" dirty="0">
+                <a:solidFill>
+                  <a:srgbClr val="111111"/>
+                </a:solidFill>
+                <a:latin typeface="Times New Roman" pitchFamily="34" charset="0"/>
+                <a:ea typeface="Times New Roman" pitchFamily="34" charset="-122"/>
+                <a:cs typeface="Times New Roman" pitchFamily="34" charset="-120"/>
+              </a:rPr>
+              <a:t>Crime rates are high.</a:t>
             </a:r>
             <a:endParaRPr lang="en-US" sz="4000" dirty="0"/>
           </a:p>
@@ -14845,7 +15492,7 @@
                 <a:ea typeface="Calibri" pitchFamily="34" charset="-122"/>
                 <a:cs typeface="Calibri" pitchFamily="34" charset="-120"/>
               </a:rPr>
-              <a:t>FORMATIVE EVALUATION</a:t>
+              <a:t>BOARD SUMMARY</a:t>
             </a:r>
             <a:endParaRPr lang="en-US" sz="1400" dirty="0"/>
           </a:p>
@@ -14910,7 +15557,7 @@
                 <a:ea typeface="Times New Roman" pitchFamily="34" charset="-122"/>
                 <a:cs typeface="Times New Roman" pitchFamily="34" charset="-120"/>
               </a:rPr>
-              <a:t>Expected Answer</a:t>
+              <a:t>2. Ghettos and Slums in AICs</a:t>
             </a:r>
             <a:endParaRPr lang="en-US" sz="3600" dirty="0"/>
           </a:p>
@@ -14924,8 +15571,47 @@
         </p:nvSpPr>
         <p:spPr>
           <a:xfrm>
-            <a:off x="5349240" y="1783080"/>
-            <a:ext cx="6522415" cy="4663440"/>
+            <a:off x="5349240" y="1737360"/>
+            <a:ext cx="6522415" cy="457200"/>
+          </a:xfrm>
+          <a:prstGeom prst="rect">
+            <a:avLst/>
+          </a:prstGeom>
+          <a:noFill/>
+          <a:ln/>
+        </p:spPr>
+        <p:txBody>
+          <a:bodyPr wrap="square" lIns="0" tIns="0" rIns="0" bIns="0" rtlCol="0" anchor="ctr"/>
+          <a:lstStyle/>
+          <a:p>
+            <a:pPr algn="l" indent="0" marL="0">
+              <a:buNone/>
+            </a:pPr>
+            <a:r>
+              <a:rPr lang="en-US" sz="3200" b="1" dirty="0">
+                <a:solidFill>
+                  <a:srgbClr val="990011"/>
+                </a:solidFill>
+                <a:latin typeface="Times New Roman" pitchFamily="34" charset="0"/>
+                <a:ea typeface="Times New Roman" pitchFamily="34" charset="-122"/>
+                <a:cs typeface="Times New Roman" pitchFamily="34" charset="-120"/>
+              </a:rPr>
+              <a:t>B) Attempted Solutions</a:t>
+            </a:r>
+            <a:endParaRPr lang="en-US" sz="3200" dirty="0"/>
+          </a:p>
+        </p:txBody>
+      </p:sp>
+      <p:sp>
+        <p:nvSpPr>
+          <p:cNvPr id="6" name="Text 3"/>
+          <p:cNvSpPr/>
+          <p:nvPr/>
+        </p:nvSpPr>
+        <p:spPr>
+          <a:xfrm>
+            <a:off x="5349240" y="2240280"/>
+            <a:ext cx="6522415" cy="4206240"/>
           </a:xfrm>
           <a:prstGeom prst="rect">
             <a:avLst/>
@@ -14944,7 +15630,7 @@
               <a:buNone/>
             </a:pPr>
             <a:r>
-              <a:rPr lang="en-US" sz="4000" dirty="0">
+              <a:rPr lang="en-US" sz="4000" i="1" dirty="0">
                 <a:solidFill>
                   <a:srgbClr val="111111"/>
                 </a:solidFill>
@@ -14952,7 +15638,81 @@
                 <a:ea typeface="Times New Roman" pitchFamily="34" charset="-122"/>
                 <a:cs typeface="Times New Roman" pitchFamily="34" charset="-120"/>
               </a:rPr>
-              <a:t>An unplanned settlement of poor self-built houses without services.</a:t>
+              <a:t>The following solutions are attempted:</a:t>
+            </a:r>
+            <a:endParaRPr lang="en-US" sz="4000" dirty="0"/>
+          </a:p>
+          <a:p>
+            <a:pPr algn="l" indent="0" marL="0">
+              <a:spcAft>
+                <a:spcPts val="800"/>
+              </a:spcAft>
+              <a:buNone/>
+            </a:pPr>
+            <a:r>
+              <a:rPr lang="en-US" sz="4000" b="1" dirty="0">
+                <a:solidFill>
+                  <a:srgbClr val="111111"/>
+                </a:solidFill>
+                <a:latin typeface="Times New Roman" pitchFamily="34" charset="0"/>
+                <a:ea typeface="Times New Roman" pitchFamily="34" charset="-122"/>
+                <a:cs typeface="Times New Roman" pitchFamily="34" charset="-120"/>
+              </a:rPr>
+              <a:t>Urban renewal: </a:t>
+            </a:r>
+            <a:pPr algn="l" indent="0" marL="0">
+              <a:spcAft>
+                <a:spcPts val="800"/>
+              </a:spcAft>
+              <a:buNone/>
+            </a:pPr>
+            <a:r>
+              <a:rPr lang="en-US" sz="4000" dirty="0">
+                <a:solidFill>
+                  <a:srgbClr val="111111"/>
+                </a:solidFill>
+                <a:latin typeface="Times New Roman" pitchFamily="34" charset="0"/>
+                <a:ea typeface="Times New Roman" pitchFamily="34" charset="-122"/>
+                <a:cs typeface="Times New Roman" pitchFamily="34" charset="-120"/>
+              </a:rPr>
+              <a:t>Old buildings are replaced by new ones.</a:t>
+            </a:r>
+            <a:endParaRPr lang="en-US" sz="4000" dirty="0"/>
+          </a:p>
+          <a:p>
+            <a:pPr algn="l" indent="0" marL="0">
+              <a:spcAft>
+                <a:spcPts val="800"/>
+              </a:spcAft>
+              <a:buNone/>
+            </a:pPr>
+            <a:r>
+              <a:rPr lang="en-US" sz="4000" b="1" dirty="0">
+                <a:solidFill>
+                  <a:srgbClr val="111111"/>
+                </a:solidFill>
+                <a:latin typeface="Times New Roman" pitchFamily="34" charset="0"/>
+                <a:ea typeface="Times New Roman" pitchFamily="34" charset="-122"/>
+                <a:cs typeface="Times New Roman" pitchFamily="34" charset="-120"/>
+              </a:rPr>
+              <a:t>Social housing: </a:t>
+            </a:r>
+            <a:pPr algn="l" indent="0" marL="0">
+              <a:spcAft>
+                <a:spcPts val="800"/>
+              </a:spcAft>
+              <a:buNone/>
+            </a:pPr>
+            <a:r>
+              <a:rPr lang="en-US" sz="4000" dirty="0">
+                <a:solidFill>
+                  <a:srgbClr val="111111"/>
+                </a:solidFill>
+                <a:latin typeface="Times New Roman" pitchFamily="34" charset="0"/>
+                <a:ea typeface="Times New Roman" pitchFamily="34" charset="-122"/>
+                <a:cs typeface="Times New Roman" pitchFamily="34" charset="-120"/>
+              </a:rPr>
+              <a:t>Cheap flats are built for poor families.</a:t>
             </a:r>
             <a:endParaRPr lang="en-US" sz="4000" dirty="0"/>
           </a:p>
@@ -15064,7 +15824,7 @@
                 <a:ea typeface="Calibri" pitchFamily="34" charset="-122"/>
                 <a:cs typeface="Calibri" pitchFamily="34" charset="-120"/>
               </a:rPr>
-              <a:t>FORMATIVE EVALUATION</a:t>
+              <a:t>BOARD SUMMARY</a:t>
             </a:r>
             <a:endParaRPr lang="en-US" sz="1400" dirty="0"/>
           </a:p>
@@ -15129,7 +15889,7 @@
                 <a:ea typeface="Times New Roman" pitchFamily="34" charset="-122"/>
                 <a:cs typeface="Times New Roman" pitchFamily="34" charset="-120"/>
               </a:rPr>
-              <a:t>Evaluation 2</a:t>
+              <a:t>2. Ghettos and Slums in AICs</a:t>
             </a:r>
             <a:endParaRPr lang="en-US" sz="3600" dirty="0"/>
           </a:p>
@@ -15143,8 +15903,47 @@
         </p:nvSpPr>
         <p:spPr>
           <a:xfrm>
-            <a:off x="5349240" y="1783080"/>
-            <a:ext cx="6522415" cy="4663440"/>
+            <a:off x="5349240" y="1737360"/>
+            <a:ext cx="6522415" cy="457200"/>
+          </a:xfrm>
+          <a:prstGeom prst="rect">
+            <a:avLst/>
+          </a:prstGeom>
+          <a:noFill/>
+          <a:ln/>
+        </p:spPr>
+        <p:txBody>
+          <a:bodyPr wrap="square" lIns="0" tIns="0" rIns="0" bIns="0" rtlCol="0" anchor="ctr"/>
+          <a:lstStyle/>
+          <a:p>
+            <a:pPr algn="l" indent="0" marL="0">
+              <a:buNone/>
+            </a:pPr>
+            <a:r>
+              <a:rPr lang="en-US" sz="3000" b="1" dirty="0">
+                <a:solidFill>
+                  <a:srgbClr val="990011"/>
+                </a:solidFill>
+                <a:latin typeface="Times New Roman" pitchFamily="34" charset="0"/>
+                <a:ea typeface="Times New Roman" pitchFamily="34" charset="-122"/>
+                <a:cs typeface="Times New Roman" pitchFamily="34" charset="-120"/>
+              </a:rPr>
+              <a:t>B) Attempted Solutions (continued)</a:t>
+            </a:r>
+            <a:endParaRPr lang="en-US" sz="3000" dirty="0"/>
+          </a:p>
+        </p:txBody>
+      </p:sp>
+      <p:sp>
+        <p:nvSpPr>
+          <p:cNvPr id="6" name="Text 3"/>
+          <p:cNvSpPr/>
+          <p:nvPr/>
+        </p:nvSpPr>
+        <p:spPr>
+          <a:xfrm>
+            <a:off x="5349240" y="2240280"/>
+            <a:ext cx="6522415" cy="4206240"/>
           </a:xfrm>
           <a:prstGeom prst="rect">
             <a:avLst/>
@@ -15163,7 +15962,7 @@
               <a:buNone/>
             </a:pPr>
             <a:r>
-              <a:rPr lang="en-US" sz="4000" dirty="0">
+              <a:rPr lang="en-US" sz="4000" b="1" dirty="0">
                 <a:solidFill>
                   <a:srgbClr val="111111"/>
                 </a:solidFill>
@@ -15171,7 +15970,24 @@
                 <a:ea typeface="Times New Roman" pitchFamily="34" charset="-122"/>
                 <a:cs typeface="Times New Roman" pitchFamily="34" charset="-120"/>
               </a:rPr>
-              <a:t>Give one example and one solution in an NIC.</a:t>
+              <a:t>Job programmes: </a:t>
+            </a:r>
+            <a:pPr algn="l" indent="0" marL="0">
+              <a:spcAft>
+                <a:spcPts val="800"/>
+              </a:spcAft>
+              <a:buNone/>
+            </a:pPr>
+            <a:r>
+              <a:rPr lang="en-US" sz="4000" dirty="0">
+                <a:solidFill>
+                  <a:srgbClr val="111111"/>
+                </a:solidFill>
+                <a:latin typeface="Times New Roman" pitchFamily="34" charset="0"/>
+                <a:ea typeface="Times New Roman" pitchFamily="34" charset="-122"/>
+                <a:cs typeface="Times New Roman" pitchFamily="34" charset="-120"/>
+              </a:rPr>
+              <a:t>People are trained and helped to find work.</a:t>
             </a:r>
             <a:endParaRPr lang="en-US" sz="4000" dirty="0"/>
           </a:p>
@@ -15283,15 +16099,54 @@
                 <a:ea typeface="Calibri" pitchFamily="34" charset="-122"/>
                 <a:cs typeface="Calibri" pitchFamily="34" charset="-120"/>
               </a:rPr>
-              <a:t>FORMATIVE EVALUATION</a:t>
+              <a:t>BOARD SUMMARY</a:t>
             </a:r>
             <a:endParaRPr lang="en-US" sz="1400" dirty="0"/>
+          </a:p>
+        </p:txBody>
+      </p:sp>
+      <p:sp>
+        <p:nvSpPr>
+          <p:cNvPr id="3" name="Text 1"/>
+          <p:cNvSpPr/>
+          <p:nvPr/>
+        </p:nvSpPr>
+        <p:spPr>
+          <a:xfrm>
+            <a:off x="457200" y="1005840"/>
+            <a:ext cx="11277295" cy="731520"/>
+          </a:xfrm>
+          <a:prstGeom prst="rect">
+            <a:avLst/>
+          </a:prstGeom>
+          <a:noFill/>
+          <a:ln/>
+        </p:spPr>
+        <p:txBody>
+          <a:bodyPr wrap="square" lIns="0" tIns="0" rIns="0" bIns="0" rtlCol="0" anchor="ctr"/>
+          <a:lstStyle/>
+          <a:p>
+            <a:pPr algn="ctr" indent="0" marL="0">
+              <a:buNone/>
+            </a:pPr>
+            <a:r>
+              <a:rPr lang="en-US" sz="3600" b="1" dirty="0">
+                <a:solidFill>
+                  <a:srgbClr val="990011"/>
+                </a:solidFill>
+                <a:latin typeface="Times New Roman" pitchFamily="34" charset="0"/>
+                <a:ea typeface="Times New Roman" pitchFamily="34" charset="-122"/>
+                <a:cs typeface="Times New Roman" pitchFamily="34" charset="-120"/>
+              </a:rPr>
+              <a:t>2. Ghettos and Slums in AICs</a:t>
+            </a:r>
+            <a:endParaRPr lang="en-US" sz="3600" dirty="0"/>
           </a:p>
         </p:txBody>
       </p:sp>
       <p:pic>
         <p:nvPicPr>
-          <p:cNvPr id="3" name="Image 0" descr="/home/claude/f4/img/minesec_sheet.png">    </p:cNvPr>
+          <p:cNvPr id="4" name="Image 0" descr="/home/claude/f4/img/v2/renewal_big.png">    </p:cNvPr>
           <p:cNvPicPr>
             <a:picLocks noChangeAspect="1"/>
           </p:cNvPicPr>
@@ -15305,8 +16160,8 @@
         </p:blipFill>
         <p:spPr>
           <a:xfrm>
-            <a:off x="0" y="658368"/>
-            <a:ext cx="5120640" cy="5833872"/>
+            <a:off x="629930" y="1783080"/>
+            <a:ext cx="10931835" cy="4270248"/>
           </a:xfrm>
           <a:prstGeom prst="rect">
             <a:avLst/>
@@ -15315,14 +16170,14 @@
       </p:pic>
       <p:sp>
         <p:nvSpPr>
-          <p:cNvPr id="4" name="Text 1"/>
+          <p:cNvPr id="5" name="Text 2"/>
           <p:cNvSpPr/>
           <p:nvPr/>
         </p:nvSpPr>
         <p:spPr>
           <a:xfrm>
-            <a:off x="5349240" y="1005840"/>
-            <a:ext cx="6522415" cy="731520"/>
+            <a:off x="457200" y="6089904"/>
+            <a:ext cx="11277295" cy="347472"/>
           </a:xfrm>
           <a:prstGeom prst="rect">
             <a:avLst/>
@@ -15331,68 +16186,24 @@
           <a:ln/>
         </p:spPr>
         <p:txBody>
-          <a:bodyPr wrap="square" lIns="0" tIns="0" rIns="0" bIns="0" rtlCol="0" anchor="ctr">
-            <a:normAutofit/>
-          </a:bodyPr>
+          <a:bodyPr wrap="square" lIns="0" tIns="0" rIns="0" bIns="0" rtlCol="0" anchor="ctr"/>
           <a:lstStyle/>
           <a:p>
             <a:pPr algn="ctr" indent="0" marL="0">
               <a:buNone/>
             </a:pPr>
             <a:r>
-              <a:rPr lang="en-US" sz="3600" b="1" dirty="0">
-                <a:solidFill>
-                  <a:srgbClr val="990011"/>
+              <a:rPr lang="en-US" sz="1800" i="1" dirty="0">
+                <a:solidFill>
+                  <a:srgbClr val="555555"/>
                 </a:solidFill>
                 <a:latin typeface="Times New Roman" pitchFamily="34" charset="0"/>
                 <a:ea typeface="Times New Roman" pitchFamily="34" charset="-122"/>
                 <a:cs typeface="Times New Roman" pitchFamily="34" charset="-120"/>
               </a:rPr>
-              <a:t>Expected Answer</a:t>
-            </a:r>
-            <a:endParaRPr lang="en-US" sz="3600" dirty="0"/>
-          </a:p>
-        </p:txBody>
-      </p:sp>
-      <p:sp>
-        <p:nvSpPr>
-          <p:cNvPr id="5" name="Text 2"/>
-          <p:cNvSpPr/>
-          <p:nvPr/>
-        </p:nvSpPr>
-        <p:spPr>
-          <a:xfrm>
-            <a:off x="5349240" y="1783080"/>
-            <a:ext cx="6522415" cy="4663440"/>
-          </a:xfrm>
-          <a:prstGeom prst="rect">
-            <a:avLst/>
-          </a:prstGeom>
-          <a:noFill/>
-          <a:ln/>
-        </p:spPr>
-        <p:txBody>
-          <a:bodyPr wrap="square" lIns="0" tIns="0" rIns="0" bIns="0" rtlCol="0" anchor="t"/>
-          <a:lstStyle/>
-          <a:p>
-            <a:pPr algn="l" indent="0" marL="0">
-              <a:spcAft>
-                <a:spcPts val="800"/>
-              </a:spcAft>
-              <a:buNone/>
-            </a:pPr>
-            <a:r>
-              <a:rPr lang="en-US" sz="4000" dirty="0">
-                <a:solidFill>
-                  <a:srgbClr val="111111"/>
-                </a:solidFill>
-                <a:latin typeface="Times New Roman" pitchFamily="34" charset="0"/>
-                <a:ea typeface="Times New Roman" pitchFamily="34" charset="-122"/>
-                <a:cs typeface="Times New Roman" pitchFamily="34" charset="-120"/>
-              </a:rPr>
-              <a:t>The favelas of Rio; self-help housing.</a:t>
-            </a:r>
-            <a:endParaRPr lang="en-US" sz="4000" dirty="0"/>
+              <a:t>Illustration: urban renewal</a:t>
+            </a:r>
+            <a:endParaRPr lang="en-US" sz="1800" dirty="0"/>
           </a:p>
         </p:txBody>
       </p:sp>
@@ -15502,7 +16313,7 @@
                 <a:ea typeface="Calibri" pitchFamily="34" charset="-122"/>
                 <a:cs typeface="Calibri" pitchFamily="34" charset="-120"/>
               </a:rPr>
-              <a:t>REMEDIATION</a:t>
+              <a:t>FORMATIVE EVALUATION</a:t>
             </a:r>
             <a:endParaRPr lang="en-US" sz="1400" dirty="0"/>
           </a:p>
@@ -15525,7 +16336,7 @@
         <p:spPr>
           <a:xfrm>
             <a:off x="0" y="658368"/>
-            <a:ext cx="2468880" cy="5833872"/>
+            <a:ext cx="5120640" cy="5833872"/>
           </a:xfrm>
           <a:prstGeom prst="rect">
             <a:avLst/>
@@ -15540,8 +16351,8 @@
         </p:nvSpPr>
         <p:spPr>
           <a:xfrm>
-            <a:off x="2697480" y="1005840"/>
-            <a:ext cx="9174175" cy="731520"/>
+            <a:off x="5349240" y="1005840"/>
+            <a:ext cx="6522415" cy="731520"/>
           </a:xfrm>
           <a:prstGeom prst="rect">
             <a:avLst/>
@@ -15567,7 +16378,7 @@
                 <a:ea typeface="Times New Roman" pitchFamily="34" charset="-122"/>
                 <a:cs typeface="Times New Roman" pitchFamily="34" charset="-120"/>
               </a:rPr>
-              <a:t>Remediation</a:t>
+              <a:t>Evaluation 1</a:t>
             </a:r>
             <a:endParaRPr lang="en-US" sz="3600" dirty="0"/>
           </a:p>
@@ -15581,8 +16392,8 @@
         </p:nvSpPr>
         <p:spPr>
           <a:xfrm>
-            <a:off x="2697480" y="1783080"/>
-            <a:ext cx="9174175" cy="4663440"/>
+            <a:off x="5349240" y="1783080"/>
+            <a:ext cx="6522415" cy="4663440"/>
           </a:xfrm>
           <a:prstGeom prst="rect">
             <a:avLst/>
@@ -15601,7 +16412,7 @@
               <a:buNone/>
             </a:pPr>
             <a:r>
-              <a:rPr lang="en-US" sz="4000" b="1" dirty="0">
+              <a:rPr lang="en-US" sz="4000" dirty="0">
                 <a:solidFill>
                   <a:srgbClr val="111111"/>
                 </a:solidFill>
@@ -15609,73 +16420,7 @@
                 <a:ea typeface="Times New Roman" pitchFamily="34" charset="-122"/>
                 <a:cs typeface="Times New Roman" pitchFamily="34" charset="-120"/>
               </a:rPr>
-              <a:t>Fill in the blanks:</a:t>
-            </a:r>
-            <a:endParaRPr lang="en-US" sz="4000" dirty="0"/>
-          </a:p>
-          <a:p>
-            <a:pPr algn="l" marL="342900" indent="-342900">
-              <a:spcAft>
-                <a:spcPts val="800"/>
-              </a:spcAft>
-              <a:buSzPct val="100000"/>
-              <a:buFont typeface="+mj-lt"/>
-              <a:buAutoNum type="arabicPeriod" startAt="1"/>
-            </a:pPr>
-            <a:r>
-              <a:rPr lang="en-US" sz="4000" dirty="0">
-                <a:solidFill>
-                  <a:srgbClr val="111111"/>
-                </a:solidFill>
-                <a:latin typeface="Times New Roman" pitchFamily="34" charset="0"/>
-                <a:ea typeface="Times New Roman" pitchFamily="34" charset="-122"/>
-                <a:cs typeface="Times New Roman" pitchFamily="34" charset="-120"/>
-              </a:rPr>
-              <a:t>Shanty towns in Brazil are called ______.</a:t>
-            </a:r>
-            <a:endParaRPr lang="en-US" sz="4000" dirty="0"/>
-          </a:p>
-          <a:p>
-            <a:pPr algn="l" marL="342900" indent="-342900">
-              <a:spcAft>
-                <a:spcPts val="800"/>
-              </a:spcAft>
-              <a:buSzPct val="100000"/>
-              <a:buFont typeface="+mj-lt"/>
-              <a:buAutoNum type="arabicPeriod" startAt="1"/>
-            </a:pPr>
-            <a:r>
-              <a:rPr lang="en-US" sz="4000" dirty="0">
-                <a:solidFill>
-                  <a:srgbClr val="111111"/>
-                </a:solidFill>
-                <a:latin typeface="Times New Roman" pitchFamily="34" charset="0"/>
-                <a:ea typeface="Times New Roman" pitchFamily="34" charset="-122"/>
-                <a:cs typeface="Times New Roman" pitchFamily="34" charset="-120"/>
-              </a:rPr>
-              <a:t>A large slum in Nairobi is ______.</a:t>
-            </a:r>
-            <a:endParaRPr lang="en-US" sz="4000" dirty="0"/>
-          </a:p>
-          <a:p>
-            <a:pPr algn="l" marL="342900" indent="-342900">
-              <a:spcAft>
-                <a:spcPts val="800"/>
-              </a:spcAft>
-              <a:buSzPct val="100000"/>
-              <a:buFont typeface="+mj-lt"/>
-              <a:buAutoNum type="arabicPeriod" startAt="1"/>
-            </a:pPr>
-            <a:r>
-              <a:rPr lang="en-US" sz="4000" dirty="0">
-                <a:solidFill>
-                  <a:srgbClr val="111111"/>
-                </a:solidFill>
-                <a:latin typeface="Times New Roman" pitchFamily="34" charset="0"/>
-                <a:ea typeface="Times New Roman" pitchFamily="34" charset="-122"/>
-                <a:cs typeface="Times New Roman" pitchFamily="34" charset="-120"/>
-              </a:rPr>
-              <a:t>Rebuilding old city areas is urban ______.</a:t>
+              <a:t>Define a shanty town.</a:t>
             </a:r>
             <a:endParaRPr lang="en-US" sz="4000" dirty="0"/>
           </a:p>
@@ -15787,7 +16532,7 @@
                 <a:ea typeface="Calibri" pitchFamily="34" charset="-122"/>
                 <a:cs typeface="Calibri" pitchFamily="34" charset="-120"/>
               </a:rPr>
-              <a:t>HOMEWORK</a:t>
+              <a:t>FORMATIVE EVALUATION</a:t>
             </a:r>
             <a:endParaRPr lang="en-US" sz="1400" dirty="0"/>
           </a:p>
@@ -15852,7 +16597,7 @@
                 <a:ea typeface="Times New Roman" pitchFamily="34" charset="-122"/>
                 <a:cs typeface="Times New Roman" pitchFamily="34" charset="-120"/>
               </a:rPr>
-              <a:t>Homework</a:t>
+              <a:t>Expected Answer</a:t>
             </a:r>
             <a:endParaRPr lang="en-US" sz="3600" dirty="0"/>
           </a:p>
@@ -15894,7 +16639,7 @@
                 <a:ea typeface="Times New Roman" pitchFamily="34" charset="-122"/>
                 <a:cs typeface="Times New Roman" pitchFamily="34" charset="-120"/>
               </a:rPr>
-              <a:t>Describe a poor quarter in a town of Cameroon and propose two solutions.</a:t>
+              <a:t>An unplanned settlement of poor self-built houses without services.</a:t>
             </a:r>
             <a:endParaRPr lang="en-US" sz="4000" dirty="0"/>
           </a:p>
@@ -16006,7 +16751,7 @@
                 <a:ea typeface="Calibri" pitchFamily="34" charset="-122"/>
                 <a:cs typeface="Calibri" pitchFamily="34" charset="-120"/>
               </a:rPr>
-              <a:t>NEXT LESSON</a:t>
+              <a:t>FORMATIVE EVALUATION</a:t>
             </a:r>
             <a:endParaRPr lang="en-US" sz="1400" dirty="0"/>
           </a:p>
@@ -16071,7 +16816,7 @@
                 <a:ea typeface="Times New Roman" pitchFamily="34" charset="-122"/>
                 <a:cs typeface="Times New Roman" pitchFamily="34" charset="-120"/>
               </a:rPr>
-              <a:t>Next Lesson</a:t>
+              <a:t>Evaluation 2</a:t>
             </a:r>
             <a:endParaRPr lang="en-US" sz="3600" dirty="0"/>
           </a:p>
@@ -16095,17 +16840,17 @@
           <a:ln/>
         </p:spPr>
         <p:txBody>
-          <a:bodyPr wrap="square" lIns="0" tIns="0" rIns="0" bIns="0" rtlCol="0" anchor="ctr"/>
-          <a:lstStyle/>
-          <a:p>
-            <a:pPr algn="ctr" indent="0" marL="0">
+          <a:bodyPr wrap="square" lIns="0" tIns="0" rIns="0" bIns="0" rtlCol="0" anchor="t"/>
+          <a:lstStyle/>
+          <a:p>
+            <a:pPr algn="l" indent="0" marL="0">
               <a:spcAft>
                 <a:spcPts val="800"/>
               </a:spcAft>
               <a:buNone/>
             </a:pPr>
             <a:r>
-              <a:rPr lang="en-US" sz="4000" b="1" dirty="0">
+              <a:rPr lang="en-US" sz="4000" dirty="0">
                 <a:solidFill>
                   <a:srgbClr val="111111"/>
                 </a:solidFill>
@@ -16113,27 +16858,7 @@
                 <a:ea typeface="Times New Roman" pitchFamily="34" charset="-122"/>
                 <a:cs typeface="Times New Roman" pitchFamily="34" charset="-120"/>
               </a:rPr>
-              <a:t>Our next lesson will be on:</a:t>
-            </a:r>
-            <a:endParaRPr lang="en-US" sz="4000" dirty="0"/>
-          </a:p>
-          <a:p>
-            <a:pPr algn="ctr" indent="0" marL="0">
-              <a:spcAft>
-                <a:spcPts val="800"/>
-              </a:spcAft>
-              <a:buNone/>
-            </a:pPr>
-            <a:r>
-              <a:rPr lang="en-US" sz="4000" b="1" dirty="0">
-                <a:solidFill>
-                  <a:srgbClr val="990011"/>
-                </a:solidFill>
-                <a:latin typeface="Times New Roman" pitchFamily="34" charset="0"/>
-                <a:ea typeface="Times New Roman" pitchFamily="34" charset="-122"/>
-                <a:cs typeface="Times New Roman" pitchFamily="34" charset="-120"/>
-              </a:rPr>
-              <a:t>Lesson 49: Functions of Urban Settlements</a:t>
+              <a:t>Give one example and one solution in an NIC.</a:t>
             </a:r>
             <a:endParaRPr lang="en-US" sz="4000" dirty="0"/>
           </a:p>
@@ -16245,6 +16970,1187 @@
                 <a:ea typeface="Calibri" pitchFamily="34" charset="-122"/>
                 <a:cs typeface="Calibri" pitchFamily="34" charset="-120"/>
               </a:rPr>
+              <a:t>FORMATIVE EVALUATION</a:t>
+            </a:r>
+            <a:endParaRPr lang="en-US" sz="1400" dirty="0"/>
+          </a:p>
+        </p:txBody>
+      </p:sp>
+      <p:pic>
+        <p:nvPicPr>
+          <p:cNvPr id="3" name="Image 0" descr="/home/claude/f4/img/minesec_sheet.png">    </p:cNvPr>
+          <p:cNvPicPr>
+            <a:picLocks noChangeAspect="1"/>
+          </p:cNvPicPr>
+          <p:nvPr/>
+        </p:nvPicPr>
+        <p:blipFill>
+          <a:blip r:embed="rId1"/>
+          <a:stretch>
+            <a:fillRect/>
+          </a:stretch>
+        </p:blipFill>
+        <p:spPr>
+          <a:xfrm>
+            <a:off x="0" y="658368"/>
+            <a:ext cx="5120640" cy="5833872"/>
+          </a:xfrm>
+          <a:prstGeom prst="rect">
+            <a:avLst/>
+          </a:prstGeom>
+        </p:spPr>
+      </p:pic>
+      <p:sp>
+        <p:nvSpPr>
+          <p:cNvPr id="4" name="Text 1"/>
+          <p:cNvSpPr/>
+          <p:nvPr/>
+        </p:nvSpPr>
+        <p:spPr>
+          <a:xfrm>
+            <a:off x="5349240" y="1005840"/>
+            <a:ext cx="6522415" cy="731520"/>
+          </a:xfrm>
+          <a:prstGeom prst="rect">
+            <a:avLst/>
+          </a:prstGeom>
+          <a:noFill/>
+          <a:ln/>
+        </p:spPr>
+        <p:txBody>
+          <a:bodyPr wrap="square" lIns="0" tIns="0" rIns="0" bIns="0" rtlCol="0" anchor="ctr">
+            <a:normAutofit/>
+          </a:bodyPr>
+          <a:lstStyle/>
+          <a:p>
+            <a:pPr algn="ctr" indent="0" marL="0">
+              <a:buNone/>
+            </a:pPr>
+            <a:r>
+              <a:rPr lang="en-US" sz="3600" b="1" dirty="0">
+                <a:solidFill>
+                  <a:srgbClr val="990011"/>
+                </a:solidFill>
+                <a:latin typeface="Times New Roman" pitchFamily="34" charset="0"/>
+                <a:ea typeface="Times New Roman" pitchFamily="34" charset="-122"/>
+                <a:cs typeface="Times New Roman" pitchFamily="34" charset="-120"/>
+              </a:rPr>
+              <a:t>Expected Answer</a:t>
+            </a:r>
+            <a:endParaRPr lang="en-US" sz="3600" dirty="0"/>
+          </a:p>
+        </p:txBody>
+      </p:sp>
+      <p:sp>
+        <p:nvSpPr>
+          <p:cNvPr id="5" name="Text 2"/>
+          <p:cNvSpPr/>
+          <p:nvPr/>
+        </p:nvSpPr>
+        <p:spPr>
+          <a:xfrm>
+            <a:off x="5349240" y="1783080"/>
+            <a:ext cx="6522415" cy="4663440"/>
+          </a:xfrm>
+          <a:prstGeom prst="rect">
+            <a:avLst/>
+          </a:prstGeom>
+          <a:noFill/>
+          <a:ln/>
+        </p:spPr>
+        <p:txBody>
+          <a:bodyPr wrap="square" lIns="0" tIns="0" rIns="0" bIns="0" rtlCol="0" anchor="t"/>
+          <a:lstStyle/>
+          <a:p>
+            <a:pPr algn="l" indent="0" marL="0">
+              <a:spcAft>
+                <a:spcPts val="800"/>
+              </a:spcAft>
+              <a:buNone/>
+            </a:pPr>
+            <a:r>
+              <a:rPr lang="en-US" sz="4000" dirty="0">
+                <a:solidFill>
+                  <a:srgbClr val="111111"/>
+                </a:solidFill>
+                <a:latin typeface="Times New Roman" pitchFamily="34" charset="0"/>
+                <a:ea typeface="Times New Roman" pitchFamily="34" charset="-122"/>
+                <a:cs typeface="Times New Roman" pitchFamily="34" charset="-120"/>
+              </a:rPr>
+              <a:t>The favelas of Rio; self-help housing.</a:t>
+            </a:r>
+            <a:endParaRPr lang="en-US" sz="4000" dirty="0"/>
+          </a:p>
+        </p:txBody>
+      </p:sp>
+      <p:sp>
+        <p:nvSpPr>
+          <p:cNvPr id="25" name="Slide Number Placeholder 0"/>
+          <p:cNvSpPr>
+            <a:spLocks noGrp="1"/>
+          </p:cNvSpPr>
+          <p:nvPr>
+            <p:ph type="sldNum" sz="quarter" idx="4294967295"/>
+          </p:nvPr>
+        </p:nvSpPr>
+        <p:spPr>
+          <a:xfrm>
+            <a:off x="27432" y="91440"/>
+            <a:ext cx="585216" cy="475488"/>
+          </a:xfrm>
+          <a:prstGeom prst="rect">
+            <a:avLst/>
+          </a:prstGeom>
+          <a:extLst>
+            <a:ext uri="{C572A759-6A51-4108-AA02-DFA0A04FC94B}">
+              <ma14:wrappingTextBoxFlag xmlns:ma14="http://schemas.microsoft.com/office/mac/drawingml/2011/main" val="0"/>
+            </a:ext>
+          </a:extLst>
+        </p:spPr>
+        <p:txBody>
+          <a:bodyPr/>
+          <a:lstStyle>
+            <a:lvl1pPr>
+              <a:defRPr sz="2000">
+                <a:solidFill>
+                  <a:srgbClr val="FFFFFF"/>
+                </a:solidFill>
+                <a:latin typeface="Calibri"/>
+                <a:ea typeface="Calibri"/>
+                <a:cs typeface="Calibri"/>
+              </a:defRPr>
+            </a:lvl1pPr>
+          </a:lstStyle>
+          <a:p>
+            <a:pPr algn="ctr"/>
+            <a:fld id="{F7021451-1387-4CA6-816F-3879F97B5CBC}" type="slidenum">
+              <a:rPr b="1" lang="en-US"/>
+              <a:t>46</a:t>
+            </a:fld>
+            <a:endParaRPr lang="en-US"/>
+          </a:p>
+        </p:txBody>
+      </p:sp>
+    </p:spTree>
+  </p:cSld>
+  <p:clrMapOvr>
+    <a:masterClrMapping/>
+  </p:clrMapOvr>
+</p:sld>
+</file>
+
+<file path=ppt/slides/slide47.xml><?xml version="1.0" encoding="utf-8"?>
+<p:sld xmlns:a="http://schemas.openxmlformats.org/drawingml/2006/main" xmlns:r="http://schemas.openxmlformats.org/officeDocument/2006/relationships" xmlns:p="http://schemas.openxmlformats.org/presentationml/2006/main">
+  <p:cSld name="Slide 47">
+    <p:spTree>
+      <p:nvGrpSpPr>
+        <p:cNvPr id="1" name=""/>
+        <p:cNvGrpSpPr/>
+        <p:nvPr/>
+      </p:nvGrpSpPr>
+      <p:grpSpPr>
+        <a:xfrm>
+          <a:off x="0" y="0"/>
+          <a:ext cx="0" cy="0"/>
+          <a:chOff x="0" y="0"/>
+          <a:chExt cx="0" cy="0"/>
+        </a:xfrm>
+      </p:grpSpPr>
+      <p:sp>
+        <p:nvSpPr>
+          <p:cNvPr id="2" name="Text 0"/>
+          <p:cNvSpPr/>
+          <p:nvPr/>
+        </p:nvSpPr>
+        <p:spPr>
+          <a:xfrm>
+            <a:off x="457200" y="713232"/>
+            <a:ext cx="11368735" cy="274320"/>
+          </a:xfrm>
+          <a:prstGeom prst="rect">
+            <a:avLst/>
+          </a:prstGeom>
+          <a:noFill/>
+          <a:ln/>
+        </p:spPr>
+        <p:txBody>
+          <a:bodyPr wrap="square" lIns="0" tIns="0" rIns="0" bIns="0" rtlCol="0" anchor="ctr"/>
+          <a:lstStyle/>
+          <a:p>
+            <a:pPr algn="r" indent="0" marL="0">
+              <a:buNone/>
+            </a:pPr>
+            <a:r>
+              <a:rPr lang="en-US" sz="1400" b="1" dirty="0">
+                <a:solidFill>
+                  <a:srgbClr val="1C3F6E"/>
+                </a:solidFill>
+                <a:latin typeface="Calibri" pitchFamily="34" charset="0"/>
+                <a:ea typeface="Calibri" pitchFamily="34" charset="-122"/>
+                <a:cs typeface="Calibri" pitchFamily="34" charset="-120"/>
+              </a:rPr>
+              <a:t>REMEDIATION</a:t>
+            </a:r>
+            <a:endParaRPr lang="en-US" sz="1400" dirty="0"/>
+          </a:p>
+        </p:txBody>
+      </p:sp>
+      <p:pic>
+        <p:nvPicPr>
+          <p:cNvPr id="3" name="Image 0" descr="/home/claude/f4/img/minesec_sheet.png">    </p:cNvPr>
+          <p:cNvPicPr>
+            <a:picLocks noChangeAspect="1"/>
+          </p:cNvPicPr>
+          <p:nvPr/>
+        </p:nvPicPr>
+        <p:blipFill>
+          <a:blip r:embed="rId1"/>
+          <a:stretch>
+            <a:fillRect/>
+          </a:stretch>
+        </p:blipFill>
+        <p:spPr>
+          <a:xfrm>
+            <a:off x="0" y="658368"/>
+            <a:ext cx="2468880" cy="5833872"/>
+          </a:xfrm>
+          <a:prstGeom prst="rect">
+            <a:avLst/>
+          </a:prstGeom>
+        </p:spPr>
+      </p:pic>
+      <p:sp>
+        <p:nvSpPr>
+          <p:cNvPr id="4" name="Text 1"/>
+          <p:cNvSpPr/>
+          <p:nvPr/>
+        </p:nvSpPr>
+        <p:spPr>
+          <a:xfrm>
+            <a:off x="2697480" y="1005840"/>
+            <a:ext cx="9174175" cy="731520"/>
+          </a:xfrm>
+          <a:prstGeom prst="rect">
+            <a:avLst/>
+          </a:prstGeom>
+          <a:noFill/>
+          <a:ln/>
+        </p:spPr>
+        <p:txBody>
+          <a:bodyPr wrap="square" lIns="0" tIns="0" rIns="0" bIns="0" rtlCol="0" anchor="ctr">
+            <a:normAutofit/>
+          </a:bodyPr>
+          <a:lstStyle/>
+          <a:p>
+            <a:pPr algn="ctr" indent="0" marL="0">
+              <a:buNone/>
+            </a:pPr>
+            <a:r>
+              <a:rPr lang="en-US" sz="3600" b="1" dirty="0">
+                <a:solidFill>
+                  <a:srgbClr val="990011"/>
+                </a:solidFill>
+                <a:latin typeface="Times New Roman" pitchFamily="34" charset="0"/>
+                <a:ea typeface="Times New Roman" pitchFamily="34" charset="-122"/>
+                <a:cs typeface="Times New Roman" pitchFamily="34" charset="-120"/>
+              </a:rPr>
+              <a:t>Remediation</a:t>
+            </a:r>
+            <a:endParaRPr lang="en-US" sz="3600" dirty="0"/>
+          </a:p>
+        </p:txBody>
+      </p:sp>
+      <p:sp>
+        <p:nvSpPr>
+          <p:cNvPr id="5" name="Text 2"/>
+          <p:cNvSpPr/>
+          <p:nvPr/>
+        </p:nvSpPr>
+        <p:spPr>
+          <a:xfrm>
+            <a:off x="2697480" y="1783080"/>
+            <a:ext cx="9174175" cy="4663440"/>
+          </a:xfrm>
+          <a:prstGeom prst="rect">
+            <a:avLst/>
+          </a:prstGeom>
+          <a:noFill/>
+          <a:ln/>
+        </p:spPr>
+        <p:txBody>
+          <a:bodyPr wrap="square" lIns="0" tIns="0" rIns="0" bIns="0" rtlCol="0" anchor="t"/>
+          <a:lstStyle/>
+          <a:p>
+            <a:pPr algn="l" indent="0" marL="0">
+              <a:spcAft>
+                <a:spcPts val="800"/>
+              </a:spcAft>
+              <a:buNone/>
+            </a:pPr>
+            <a:r>
+              <a:rPr lang="en-US" sz="4000" b="1" dirty="0">
+                <a:solidFill>
+                  <a:srgbClr val="111111"/>
+                </a:solidFill>
+                <a:latin typeface="Times New Roman" pitchFamily="34" charset="0"/>
+                <a:ea typeface="Times New Roman" pitchFamily="34" charset="-122"/>
+                <a:cs typeface="Times New Roman" pitchFamily="34" charset="-120"/>
+              </a:rPr>
+              <a:t>Fill in the blanks:</a:t>
+            </a:r>
+            <a:endParaRPr lang="en-US" sz="4000" dirty="0"/>
+          </a:p>
+          <a:p>
+            <a:pPr algn="l" marL="342900" indent="-342900">
+              <a:spcAft>
+                <a:spcPts val="800"/>
+              </a:spcAft>
+              <a:buSzPct val="100000"/>
+              <a:buFont typeface="+mj-lt"/>
+              <a:buAutoNum type="arabicPeriod" startAt="1"/>
+            </a:pPr>
+            <a:r>
+              <a:rPr lang="en-US" sz="4000" dirty="0">
+                <a:solidFill>
+                  <a:srgbClr val="111111"/>
+                </a:solidFill>
+                <a:latin typeface="Times New Roman" pitchFamily="34" charset="0"/>
+                <a:ea typeface="Times New Roman" pitchFamily="34" charset="-122"/>
+                <a:cs typeface="Times New Roman" pitchFamily="34" charset="-120"/>
+              </a:rPr>
+              <a:t>Shanty towns in Brazil are called ______.</a:t>
+            </a:r>
+            <a:endParaRPr lang="en-US" sz="4000" dirty="0"/>
+          </a:p>
+          <a:p>
+            <a:pPr algn="l" marL="342900" indent="-342900">
+              <a:spcAft>
+                <a:spcPts val="800"/>
+              </a:spcAft>
+              <a:buSzPct val="100000"/>
+              <a:buFont typeface="+mj-lt"/>
+              <a:buAutoNum type="arabicPeriod" startAt="1"/>
+            </a:pPr>
+            <a:r>
+              <a:rPr lang="en-US" sz="4000" dirty="0">
+                <a:solidFill>
+                  <a:srgbClr val="111111"/>
+                </a:solidFill>
+                <a:latin typeface="Times New Roman" pitchFamily="34" charset="0"/>
+                <a:ea typeface="Times New Roman" pitchFamily="34" charset="-122"/>
+                <a:cs typeface="Times New Roman" pitchFamily="34" charset="-120"/>
+              </a:rPr>
+              <a:t>A large slum in Nairobi is ______.</a:t>
+            </a:r>
+            <a:endParaRPr lang="en-US" sz="4000" dirty="0"/>
+          </a:p>
+          <a:p>
+            <a:pPr algn="l" marL="342900" indent="-342900">
+              <a:spcAft>
+                <a:spcPts val="800"/>
+              </a:spcAft>
+              <a:buSzPct val="100000"/>
+              <a:buFont typeface="+mj-lt"/>
+              <a:buAutoNum type="arabicPeriod" startAt="1"/>
+            </a:pPr>
+            <a:r>
+              <a:rPr lang="en-US" sz="4000" dirty="0">
+                <a:solidFill>
+                  <a:srgbClr val="111111"/>
+                </a:solidFill>
+                <a:latin typeface="Times New Roman" pitchFamily="34" charset="0"/>
+                <a:ea typeface="Times New Roman" pitchFamily="34" charset="-122"/>
+                <a:cs typeface="Times New Roman" pitchFamily="34" charset="-120"/>
+              </a:rPr>
+              <a:t>Rebuilding old city areas is urban ______.</a:t>
+            </a:r>
+            <a:endParaRPr lang="en-US" sz="4000" dirty="0"/>
+          </a:p>
+        </p:txBody>
+      </p:sp>
+      <p:sp>
+        <p:nvSpPr>
+          <p:cNvPr id="25" name="Slide Number Placeholder 0"/>
+          <p:cNvSpPr>
+            <a:spLocks noGrp="1"/>
+          </p:cNvSpPr>
+          <p:nvPr>
+            <p:ph type="sldNum" sz="quarter" idx="4294967295"/>
+          </p:nvPr>
+        </p:nvSpPr>
+        <p:spPr>
+          <a:xfrm>
+            <a:off x="27432" y="91440"/>
+            <a:ext cx="585216" cy="475488"/>
+          </a:xfrm>
+          <a:prstGeom prst="rect">
+            <a:avLst/>
+          </a:prstGeom>
+          <a:extLst>
+            <a:ext uri="{C572A759-6A51-4108-AA02-DFA0A04FC94B}">
+              <ma14:wrappingTextBoxFlag xmlns:ma14="http://schemas.microsoft.com/office/mac/drawingml/2011/main" val="0"/>
+            </a:ext>
+          </a:extLst>
+        </p:spPr>
+        <p:txBody>
+          <a:bodyPr/>
+          <a:lstStyle>
+            <a:lvl1pPr>
+              <a:defRPr sz="2000">
+                <a:solidFill>
+                  <a:srgbClr val="FFFFFF"/>
+                </a:solidFill>
+                <a:latin typeface="Calibri"/>
+                <a:ea typeface="Calibri"/>
+                <a:cs typeface="Calibri"/>
+              </a:defRPr>
+            </a:lvl1pPr>
+          </a:lstStyle>
+          <a:p>
+            <a:pPr algn="ctr"/>
+            <a:fld id="{F7021451-1387-4CA6-816F-3879F97B5CBC}" type="slidenum">
+              <a:rPr b="1" lang="en-US"/>
+              <a:t>47</a:t>
+            </a:fld>
+            <a:endParaRPr lang="en-US"/>
+          </a:p>
+        </p:txBody>
+      </p:sp>
+    </p:spTree>
+  </p:cSld>
+  <p:clrMapOvr>
+    <a:masterClrMapping/>
+  </p:clrMapOvr>
+</p:sld>
+</file>
+
+<file path=ppt/slides/slide48.xml><?xml version="1.0" encoding="utf-8"?>
+<p:sld xmlns:a="http://schemas.openxmlformats.org/drawingml/2006/main" xmlns:r="http://schemas.openxmlformats.org/officeDocument/2006/relationships" xmlns:p="http://schemas.openxmlformats.org/presentationml/2006/main">
+  <p:cSld name="Slide 48">
+    <p:spTree>
+      <p:nvGrpSpPr>
+        <p:cNvPr id="1" name=""/>
+        <p:cNvGrpSpPr/>
+        <p:nvPr/>
+      </p:nvGrpSpPr>
+      <p:grpSpPr>
+        <a:xfrm>
+          <a:off x="0" y="0"/>
+          <a:ext cx="0" cy="0"/>
+          <a:chOff x="0" y="0"/>
+          <a:chExt cx="0" cy="0"/>
+        </a:xfrm>
+      </p:grpSpPr>
+      <p:sp>
+        <p:nvSpPr>
+          <p:cNvPr id="2" name="Text 0"/>
+          <p:cNvSpPr/>
+          <p:nvPr/>
+        </p:nvSpPr>
+        <p:spPr>
+          <a:xfrm>
+            <a:off x="457200" y="713232"/>
+            <a:ext cx="11368735" cy="274320"/>
+          </a:xfrm>
+          <a:prstGeom prst="rect">
+            <a:avLst/>
+          </a:prstGeom>
+          <a:noFill/>
+          <a:ln/>
+        </p:spPr>
+        <p:txBody>
+          <a:bodyPr wrap="square" lIns="0" tIns="0" rIns="0" bIns="0" rtlCol="0" anchor="ctr"/>
+          <a:lstStyle/>
+          <a:p>
+            <a:pPr algn="r" indent="0" marL="0">
+              <a:buNone/>
+            </a:pPr>
+            <a:r>
+              <a:rPr lang="en-US" sz="1400" b="1" dirty="0">
+                <a:solidFill>
+                  <a:srgbClr val="1C3F6E"/>
+                </a:solidFill>
+                <a:latin typeface="Calibri" pitchFamily="34" charset="0"/>
+                <a:ea typeface="Calibri" pitchFamily="34" charset="-122"/>
+                <a:cs typeface="Calibri" pitchFamily="34" charset="-120"/>
+              </a:rPr>
+              <a:t>HOMEWORK</a:t>
+            </a:r>
+            <a:endParaRPr lang="en-US" sz="1400" dirty="0"/>
+          </a:p>
+        </p:txBody>
+      </p:sp>
+      <p:pic>
+        <p:nvPicPr>
+          <p:cNvPr id="3" name="Image 0" descr="/home/claude/f4/img/minesec_sheet.png">    </p:cNvPr>
+          <p:cNvPicPr>
+            <a:picLocks noChangeAspect="1"/>
+          </p:cNvPicPr>
+          <p:nvPr/>
+        </p:nvPicPr>
+        <p:blipFill>
+          <a:blip r:embed="rId1"/>
+          <a:stretch>
+            <a:fillRect/>
+          </a:stretch>
+        </p:blipFill>
+        <p:spPr>
+          <a:xfrm>
+            <a:off x="0" y="658368"/>
+            <a:ext cx="5120640" cy="5833872"/>
+          </a:xfrm>
+          <a:prstGeom prst="rect">
+            <a:avLst/>
+          </a:prstGeom>
+        </p:spPr>
+      </p:pic>
+      <p:sp>
+        <p:nvSpPr>
+          <p:cNvPr id="4" name="Text 1"/>
+          <p:cNvSpPr/>
+          <p:nvPr/>
+        </p:nvSpPr>
+        <p:spPr>
+          <a:xfrm>
+            <a:off x="5349240" y="1005840"/>
+            <a:ext cx="6522415" cy="731520"/>
+          </a:xfrm>
+          <a:prstGeom prst="rect">
+            <a:avLst/>
+          </a:prstGeom>
+          <a:noFill/>
+          <a:ln/>
+        </p:spPr>
+        <p:txBody>
+          <a:bodyPr wrap="square" lIns="0" tIns="0" rIns="0" bIns="0" rtlCol="0" anchor="ctr">
+            <a:normAutofit/>
+          </a:bodyPr>
+          <a:lstStyle/>
+          <a:p>
+            <a:pPr algn="ctr" indent="0" marL="0">
+              <a:buNone/>
+            </a:pPr>
+            <a:r>
+              <a:rPr lang="en-US" sz="3600" b="1" dirty="0">
+                <a:solidFill>
+                  <a:srgbClr val="990011"/>
+                </a:solidFill>
+                <a:latin typeface="Times New Roman" pitchFamily="34" charset="0"/>
+                <a:ea typeface="Times New Roman" pitchFamily="34" charset="-122"/>
+                <a:cs typeface="Times New Roman" pitchFamily="34" charset="-120"/>
+              </a:rPr>
+              <a:t>Homework</a:t>
+            </a:r>
+            <a:endParaRPr lang="en-US" sz="3600" dirty="0"/>
+          </a:p>
+        </p:txBody>
+      </p:sp>
+      <p:sp>
+        <p:nvSpPr>
+          <p:cNvPr id="5" name="Text 2"/>
+          <p:cNvSpPr/>
+          <p:nvPr/>
+        </p:nvSpPr>
+        <p:spPr>
+          <a:xfrm>
+            <a:off x="5349240" y="1783080"/>
+            <a:ext cx="6522415" cy="4663440"/>
+          </a:xfrm>
+          <a:prstGeom prst="rect">
+            <a:avLst/>
+          </a:prstGeom>
+          <a:noFill/>
+          <a:ln/>
+        </p:spPr>
+        <p:txBody>
+          <a:bodyPr wrap="square" lIns="0" tIns="0" rIns="0" bIns="0" rtlCol="0" anchor="t"/>
+          <a:lstStyle/>
+          <a:p>
+            <a:pPr algn="l" indent="0" marL="0">
+              <a:spcAft>
+                <a:spcPts val="800"/>
+              </a:spcAft>
+              <a:buNone/>
+            </a:pPr>
+            <a:r>
+              <a:rPr lang="en-US" sz="4000" dirty="0">
+                <a:solidFill>
+                  <a:srgbClr val="111111"/>
+                </a:solidFill>
+                <a:latin typeface="Times New Roman" pitchFamily="34" charset="0"/>
+                <a:ea typeface="Times New Roman" pitchFamily="34" charset="-122"/>
+                <a:cs typeface="Times New Roman" pitchFamily="34" charset="-120"/>
+              </a:rPr>
+              <a:t>Describe a poor quarter in a town of Cameroon and propose two solutions.</a:t>
+            </a:r>
+            <a:endParaRPr lang="en-US" sz="4000" dirty="0"/>
+          </a:p>
+        </p:txBody>
+      </p:sp>
+      <p:sp>
+        <p:nvSpPr>
+          <p:cNvPr id="25" name="Slide Number Placeholder 0"/>
+          <p:cNvSpPr>
+            <a:spLocks noGrp="1"/>
+          </p:cNvSpPr>
+          <p:nvPr>
+            <p:ph type="sldNum" sz="quarter" idx="4294967295"/>
+          </p:nvPr>
+        </p:nvSpPr>
+        <p:spPr>
+          <a:xfrm>
+            <a:off x="27432" y="91440"/>
+            <a:ext cx="585216" cy="475488"/>
+          </a:xfrm>
+          <a:prstGeom prst="rect">
+            <a:avLst/>
+          </a:prstGeom>
+          <a:extLst>
+            <a:ext uri="{C572A759-6A51-4108-AA02-DFA0A04FC94B}">
+              <ma14:wrappingTextBoxFlag xmlns:ma14="http://schemas.microsoft.com/office/mac/drawingml/2011/main" val="0"/>
+            </a:ext>
+          </a:extLst>
+        </p:spPr>
+        <p:txBody>
+          <a:bodyPr/>
+          <a:lstStyle>
+            <a:lvl1pPr>
+              <a:defRPr sz="2000">
+                <a:solidFill>
+                  <a:srgbClr val="FFFFFF"/>
+                </a:solidFill>
+                <a:latin typeface="Calibri"/>
+                <a:ea typeface="Calibri"/>
+                <a:cs typeface="Calibri"/>
+              </a:defRPr>
+            </a:lvl1pPr>
+          </a:lstStyle>
+          <a:p>
+            <a:pPr algn="ctr"/>
+            <a:fld id="{F7021451-1387-4CA6-816F-3879F97B5CBC}" type="slidenum">
+              <a:rPr b="1" lang="en-US"/>
+              <a:t>48</a:t>
+            </a:fld>
+            <a:endParaRPr lang="en-US"/>
+          </a:p>
+        </p:txBody>
+      </p:sp>
+    </p:spTree>
+  </p:cSld>
+  <p:clrMapOvr>
+    <a:masterClrMapping/>
+  </p:clrMapOvr>
+</p:sld>
+</file>
+
+<file path=ppt/slides/slide49.xml><?xml version="1.0" encoding="utf-8"?>
+<p:sld xmlns:a="http://schemas.openxmlformats.org/drawingml/2006/main" xmlns:r="http://schemas.openxmlformats.org/officeDocument/2006/relationships" xmlns:p="http://schemas.openxmlformats.org/presentationml/2006/main">
+  <p:cSld name="Slide 49">
+    <p:spTree>
+      <p:nvGrpSpPr>
+        <p:cNvPr id="1" name=""/>
+        <p:cNvGrpSpPr/>
+        <p:nvPr/>
+      </p:nvGrpSpPr>
+      <p:grpSpPr>
+        <a:xfrm>
+          <a:off x="0" y="0"/>
+          <a:ext cx="0" cy="0"/>
+          <a:chOff x="0" y="0"/>
+          <a:chExt cx="0" cy="0"/>
+        </a:xfrm>
+      </p:grpSpPr>
+      <p:sp>
+        <p:nvSpPr>
+          <p:cNvPr id="2" name="Text 0"/>
+          <p:cNvSpPr/>
+          <p:nvPr/>
+        </p:nvSpPr>
+        <p:spPr>
+          <a:xfrm>
+            <a:off x="457200" y="713232"/>
+            <a:ext cx="11368735" cy="274320"/>
+          </a:xfrm>
+          <a:prstGeom prst="rect">
+            <a:avLst/>
+          </a:prstGeom>
+          <a:noFill/>
+          <a:ln/>
+        </p:spPr>
+        <p:txBody>
+          <a:bodyPr wrap="square" lIns="0" tIns="0" rIns="0" bIns="0" rtlCol="0" anchor="ctr"/>
+          <a:lstStyle/>
+          <a:p>
+            <a:pPr algn="r" indent="0" marL="0">
+              <a:buNone/>
+            </a:pPr>
+            <a:r>
+              <a:rPr lang="en-US" sz="1400" b="1" dirty="0">
+                <a:solidFill>
+                  <a:srgbClr val="1C3F6E"/>
+                </a:solidFill>
+                <a:latin typeface="Calibri" pitchFamily="34" charset="0"/>
+                <a:ea typeface="Calibri" pitchFamily="34" charset="-122"/>
+                <a:cs typeface="Calibri" pitchFamily="34" charset="-120"/>
+              </a:rPr>
+              <a:t>NEXT LESSON</a:t>
+            </a:r>
+            <a:endParaRPr lang="en-US" sz="1400" dirty="0"/>
+          </a:p>
+        </p:txBody>
+      </p:sp>
+      <p:pic>
+        <p:nvPicPr>
+          <p:cNvPr id="3" name="Image 0" descr="/home/claude/f4/img/minesec_sheet.png">    </p:cNvPr>
+          <p:cNvPicPr>
+            <a:picLocks noChangeAspect="1"/>
+          </p:cNvPicPr>
+          <p:nvPr/>
+        </p:nvPicPr>
+        <p:blipFill>
+          <a:blip r:embed="rId1"/>
+          <a:stretch>
+            <a:fillRect/>
+          </a:stretch>
+        </p:blipFill>
+        <p:spPr>
+          <a:xfrm>
+            <a:off x="0" y="658368"/>
+            <a:ext cx="5120640" cy="5833872"/>
+          </a:xfrm>
+          <a:prstGeom prst="rect">
+            <a:avLst/>
+          </a:prstGeom>
+        </p:spPr>
+      </p:pic>
+      <p:sp>
+        <p:nvSpPr>
+          <p:cNvPr id="4" name="Text 1"/>
+          <p:cNvSpPr/>
+          <p:nvPr/>
+        </p:nvSpPr>
+        <p:spPr>
+          <a:xfrm>
+            <a:off x="5349240" y="1005840"/>
+            <a:ext cx="6522415" cy="731520"/>
+          </a:xfrm>
+          <a:prstGeom prst="rect">
+            <a:avLst/>
+          </a:prstGeom>
+          <a:noFill/>
+          <a:ln/>
+        </p:spPr>
+        <p:txBody>
+          <a:bodyPr wrap="square" lIns="0" tIns="0" rIns="0" bIns="0" rtlCol="0" anchor="ctr">
+            <a:normAutofit/>
+          </a:bodyPr>
+          <a:lstStyle/>
+          <a:p>
+            <a:pPr algn="ctr" indent="0" marL="0">
+              <a:buNone/>
+            </a:pPr>
+            <a:r>
+              <a:rPr lang="en-US" sz="3600" b="1" dirty="0">
+                <a:solidFill>
+                  <a:srgbClr val="990011"/>
+                </a:solidFill>
+                <a:latin typeface="Times New Roman" pitchFamily="34" charset="0"/>
+                <a:ea typeface="Times New Roman" pitchFamily="34" charset="-122"/>
+                <a:cs typeface="Times New Roman" pitchFamily="34" charset="-120"/>
+              </a:rPr>
+              <a:t>Next Lesson</a:t>
+            </a:r>
+            <a:endParaRPr lang="en-US" sz="3600" dirty="0"/>
+          </a:p>
+        </p:txBody>
+      </p:sp>
+      <p:sp>
+        <p:nvSpPr>
+          <p:cNvPr id="5" name="Text 2"/>
+          <p:cNvSpPr/>
+          <p:nvPr/>
+        </p:nvSpPr>
+        <p:spPr>
+          <a:xfrm>
+            <a:off x="5349240" y="1783080"/>
+            <a:ext cx="6522415" cy="4663440"/>
+          </a:xfrm>
+          <a:prstGeom prst="rect">
+            <a:avLst/>
+          </a:prstGeom>
+          <a:noFill/>
+          <a:ln/>
+        </p:spPr>
+        <p:txBody>
+          <a:bodyPr wrap="square" lIns="0" tIns="0" rIns="0" bIns="0" rtlCol="0" anchor="ctr"/>
+          <a:lstStyle/>
+          <a:p>
+            <a:pPr algn="ctr" indent="0" marL="0">
+              <a:spcAft>
+                <a:spcPts val="800"/>
+              </a:spcAft>
+              <a:buNone/>
+            </a:pPr>
+            <a:r>
+              <a:rPr lang="en-US" sz="4000" b="1" dirty="0">
+                <a:solidFill>
+                  <a:srgbClr val="111111"/>
+                </a:solidFill>
+                <a:latin typeface="Times New Roman" pitchFamily="34" charset="0"/>
+                <a:ea typeface="Times New Roman" pitchFamily="34" charset="-122"/>
+                <a:cs typeface="Times New Roman" pitchFamily="34" charset="-120"/>
+              </a:rPr>
+              <a:t>Our next lesson will be on:</a:t>
+            </a:r>
+            <a:endParaRPr lang="en-US" sz="4000" dirty="0"/>
+          </a:p>
+          <a:p>
+            <a:pPr algn="ctr" indent="0" marL="0">
+              <a:spcAft>
+                <a:spcPts val="800"/>
+              </a:spcAft>
+              <a:buNone/>
+            </a:pPr>
+            <a:r>
+              <a:rPr lang="en-US" sz="4000" b="1" dirty="0">
+                <a:solidFill>
+                  <a:srgbClr val="990011"/>
+                </a:solidFill>
+                <a:latin typeface="Times New Roman" pitchFamily="34" charset="0"/>
+                <a:ea typeface="Times New Roman" pitchFamily="34" charset="-122"/>
+                <a:cs typeface="Times New Roman" pitchFamily="34" charset="-120"/>
+              </a:rPr>
+              <a:t>Lesson 49: Functions of Urban Settlements</a:t>
+            </a:r>
+            <a:endParaRPr lang="en-US" sz="4000" dirty="0"/>
+          </a:p>
+        </p:txBody>
+      </p:sp>
+      <p:sp>
+        <p:nvSpPr>
+          <p:cNvPr id="25" name="Slide Number Placeholder 0"/>
+          <p:cNvSpPr>
+            <a:spLocks noGrp="1"/>
+          </p:cNvSpPr>
+          <p:nvPr>
+            <p:ph type="sldNum" sz="quarter" idx="4294967295"/>
+          </p:nvPr>
+        </p:nvSpPr>
+        <p:spPr>
+          <a:xfrm>
+            <a:off x="27432" y="91440"/>
+            <a:ext cx="585216" cy="475488"/>
+          </a:xfrm>
+          <a:prstGeom prst="rect">
+            <a:avLst/>
+          </a:prstGeom>
+          <a:extLst>
+            <a:ext uri="{C572A759-6A51-4108-AA02-DFA0A04FC94B}">
+              <ma14:wrappingTextBoxFlag xmlns:ma14="http://schemas.microsoft.com/office/mac/drawingml/2011/main" val="0"/>
+            </a:ext>
+          </a:extLst>
+        </p:spPr>
+        <p:txBody>
+          <a:bodyPr/>
+          <a:lstStyle>
+            <a:lvl1pPr>
+              <a:defRPr sz="2000">
+                <a:solidFill>
+                  <a:srgbClr val="FFFFFF"/>
+                </a:solidFill>
+                <a:latin typeface="Calibri"/>
+                <a:ea typeface="Calibri"/>
+                <a:cs typeface="Calibri"/>
+              </a:defRPr>
+            </a:lvl1pPr>
+          </a:lstStyle>
+          <a:p>
+            <a:pPr algn="ctr"/>
+            <a:fld id="{F7021451-1387-4CA6-816F-3879F97B5CBC}" type="slidenum">
+              <a:rPr b="1" lang="en-US"/>
+              <a:t>49</a:t>
+            </a:fld>
+            <a:endParaRPr lang="en-US"/>
+          </a:p>
+        </p:txBody>
+      </p:sp>
+    </p:spTree>
+  </p:cSld>
+  <p:clrMapOvr>
+    <a:masterClrMapping/>
+  </p:clrMapOvr>
+</p:sld>
+</file>
+
+<file path=ppt/slides/slide5.xml><?xml version="1.0" encoding="utf-8"?>
+<p:sld xmlns:a="http://schemas.openxmlformats.org/drawingml/2006/main" xmlns:r="http://schemas.openxmlformats.org/officeDocument/2006/relationships" xmlns:p="http://schemas.openxmlformats.org/presentationml/2006/main">
+  <p:cSld name="Slide 5">
+    <p:spTree>
+      <p:nvGrpSpPr>
+        <p:cNvPr id="1" name=""/>
+        <p:cNvGrpSpPr/>
+        <p:nvPr/>
+      </p:nvGrpSpPr>
+      <p:grpSpPr>
+        <a:xfrm>
+          <a:off x="0" y="0"/>
+          <a:ext cx="0" cy="0"/>
+          <a:chOff x="0" y="0"/>
+          <a:chExt cx="0" cy="0"/>
+        </a:xfrm>
+      </p:grpSpPr>
+      <p:sp>
+        <p:nvSpPr>
+          <p:cNvPr id="2" name="Text 0"/>
+          <p:cNvSpPr/>
+          <p:nvPr/>
+        </p:nvSpPr>
+        <p:spPr>
+          <a:xfrm>
+            <a:off x="457200" y="713232"/>
+            <a:ext cx="11368735" cy="274320"/>
+          </a:xfrm>
+          <a:prstGeom prst="rect">
+            <a:avLst/>
+          </a:prstGeom>
+          <a:noFill/>
+          <a:ln/>
+        </p:spPr>
+        <p:txBody>
+          <a:bodyPr wrap="square" lIns="0" tIns="0" rIns="0" bIns="0" rtlCol="0" anchor="ctr"/>
+          <a:lstStyle/>
+          <a:p>
+            <a:pPr algn="r" indent="0" marL="0">
+              <a:buNone/>
+            </a:pPr>
+            <a:r>
+              <a:rPr lang="en-US" sz="1400" b="1" dirty="0">
+                <a:solidFill>
+                  <a:srgbClr val="1C3F6E"/>
+                </a:solidFill>
+                <a:latin typeface="Calibri" pitchFamily="34" charset="0"/>
+                <a:ea typeface="Calibri" pitchFamily="34" charset="-122"/>
+                <a:cs typeface="Calibri" pitchFamily="34" charset="-120"/>
+              </a:rPr>
+              <a:t>HOMEWORK CORRECTION</a:t>
+            </a:r>
+            <a:endParaRPr lang="en-US" sz="1400" dirty="0"/>
+          </a:p>
+        </p:txBody>
+      </p:sp>
+      <p:pic>
+        <p:nvPicPr>
+          <p:cNvPr id="3" name="Image 0" descr="/home/claude/f4/img/minesec_sheet.png">    </p:cNvPr>
+          <p:cNvPicPr>
+            <a:picLocks noChangeAspect="1"/>
+          </p:cNvPicPr>
+          <p:nvPr/>
+        </p:nvPicPr>
+        <p:blipFill>
+          <a:blip r:embed="rId1"/>
+          <a:stretch>
+            <a:fillRect/>
+          </a:stretch>
+        </p:blipFill>
+        <p:spPr>
+          <a:xfrm>
+            <a:off x="0" y="658368"/>
+            <a:ext cx="5120640" cy="5833872"/>
+          </a:xfrm>
+          <a:prstGeom prst="rect">
+            <a:avLst/>
+          </a:prstGeom>
+        </p:spPr>
+      </p:pic>
+      <p:sp>
+        <p:nvSpPr>
+          <p:cNvPr id="4" name="Text 1"/>
+          <p:cNvSpPr/>
+          <p:nvPr/>
+        </p:nvSpPr>
+        <p:spPr>
+          <a:xfrm>
+            <a:off x="5349240" y="1005840"/>
+            <a:ext cx="6522415" cy="731520"/>
+          </a:xfrm>
+          <a:prstGeom prst="rect">
+            <a:avLst/>
+          </a:prstGeom>
+          <a:noFill/>
+          <a:ln/>
+        </p:spPr>
+        <p:txBody>
+          <a:bodyPr wrap="square" lIns="0" tIns="0" rIns="0" bIns="0" rtlCol="0" anchor="ctr">
+            <a:normAutofit/>
+          </a:bodyPr>
+          <a:lstStyle/>
+          <a:p>
+            <a:pPr algn="ctr" indent="0" marL="0">
+              <a:buNone/>
+            </a:pPr>
+            <a:r>
+              <a:rPr lang="en-US" sz="3600" b="1" dirty="0">
+                <a:solidFill>
+                  <a:srgbClr val="990011"/>
+                </a:solidFill>
+                <a:latin typeface="Times New Roman" pitchFamily="34" charset="0"/>
+                <a:ea typeface="Times New Roman" pitchFamily="34" charset="-122"/>
+                <a:cs typeface="Times New Roman" pitchFamily="34" charset="-120"/>
+              </a:rPr>
+              <a:t>Correction: Possible Answer</a:t>
+            </a:r>
+            <a:endParaRPr lang="en-US" sz="3600" dirty="0"/>
+          </a:p>
+        </p:txBody>
+      </p:sp>
+      <p:sp>
+        <p:nvSpPr>
+          <p:cNvPr id="5" name="Text 2"/>
+          <p:cNvSpPr/>
+          <p:nvPr/>
+        </p:nvSpPr>
+        <p:spPr>
+          <a:xfrm>
+            <a:off x="5349240" y="1783080"/>
+            <a:ext cx="6522415" cy="4663440"/>
+          </a:xfrm>
+          <a:prstGeom prst="rect">
+            <a:avLst/>
+          </a:prstGeom>
+          <a:noFill/>
+          <a:ln/>
+        </p:spPr>
+        <p:txBody>
+          <a:bodyPr wrap="square" lIns="0" tIns="0" rIns="0" bIns="0" rtlCol="0" anchor="t"/>
+          <a:lstStyle/>
+          <a:p>
+            <a:pPr algn="l" indent="0" marL="0">
+              <a:spcAft>
+                <a:spcPts val="800"/>
+              </a:spcAft>
+              <a:buNone/>
+            </a:pPr>
+            <a:r>
+              <a:rPr lang="en-US" sz="4000" dirty="0">
+                <a:solidFill>
+                  <a:srgbClr val="111111"/>
+                </a:solidFill>
+                <a:latin typeface="Times New Roman" pitchFamily="34" charset="0"/>
+                <a:ea typeface="Times New Roman" pitchFamily="34" charset="-122"/>
+                <a:cs typeface="Times New Roman" pitchFamily="34" charset="-120"/>
+              </a:rPr>
+              <a:t>Waste (bins and collection), floods (clean drains), traffic jams (new roads and public transport).</a:t>
+            </a:r>
+            <a:endParaRPr lang="en-US" sz="4000" dirty="0"/>
+          </a:p>
+        </p:txBody>
+      </p:sp>
+      <p:sp>
+        <p:nvSpPr>
+          <p:cNvPr id="25" name="Slide Number Placeholder 0"/>
+          <p:cNvSpPr>
+            <a:spLocks noGrp="1"/>
+          </p:cNvSpPr>
+          <p:nvPr>
+            <p:ph type="sldNum" sz="quarter" idx="4294967295"/>
+          </p:nvPr>
+        </p:nvSpPr>
+        <p:spPr>
+          <a:xfrm>
+            <a:off x="27432" y="91440"/>
+            <a:ext cx="585216" cy="475488"/>
+          </a:xfrm>
+          <a:prstGeom prst="rect">
+            <a:avLst/>
+          </a:prstGeom>
+          <a:extLst>
+            <a:ext uri="{C572A759-6A51-4108-AA02-DFA0A04FC94B}">
+              <ma14:wrappingTextBoxFlag xmlns:ma14="http://schemas.microsoft.com/office/mac/drawingml/2011/main" val="0"/>
+            </a:ext>
+          </a:extLst>
+        </p:spPr>
+        <p:txBody>
+          <a:bodyPr/>
+          <a:lstStyle>
+            <a:lvl1pPr>
+              <a:defRPr sz="2000">
+                <a:solidFill>
+                  <a:srgbClr val="FFFFFF"/>
+                </a:solidFill>
+                <a:latin typeface="Calibri"/>
+                <a:ea typeface="Calibri"/>
+                <a:cs typeface="Calibri"/>
+              </a:defRPr>
+            </a:lvl1pPr>
+          </a:lstStyle>
+          <a:p>
+            <a:pPr algn="ctr"/>
+            <a:fld id="{F7021451-1387-4CA6-816F-3879F97B5CBC}" type="slidenum">
+              <a:rPr b="1" lang="en-US"/>
+              <a:t>5</a:t>
+            </a:fld>
+            <a:endParaRPr lang="en-US"/>
+          </a:p>
+        </p:txBody>
+      </p:sp>
+    </p:spTree>
+  </p:cSld>
+  <p:clrMapOvr>
+    <a:masterClrMapping/>
+  </p:clrMapOvr>
+</p:sld>
+</file>
+
+<file path=ppt/slides/slide50.xml><?xml version="1.0" encoding="utf-8"?>
+<p:sld xmlns:a="http://schemas.openxmlformats.org/drawingml/2006/main" xmlns:r="http://schemas.openxmlformats.org/officeDocument/2006/relationships" xmlns:p="http://schemas.openxmlformats.org/presentationml/2006/main">
+  <p:cSld name="Slide 50">
+    <p:spTree>
+      <p:nvGrpSpPr>
+        <p:cNvPr id="1" name=""/>
+        <p:cNvGrpSpPr/>
+        <p:nvPr/>
+      </p:nvGrpSpPr>
+      <p:grpSpPr>
+        <a:xfrm>
+          <a:off x="0" y="0"/>
+          <a:ext cx="0" cy="0"/>
+          <a:chOff x="0" y="0"/>
+          <a:chExt cx="0" cy="0"/>
+        </a:xfrm>
+      </p:grpSpPr>
+      <p:sp>
+        <p:nvSpPr>
+          <p:cNvPr id="2" name="Text 0"/>
+          <p:cNvSpPr/>
+          <p:nvPr/>
+        </p:nvSpPr>
+        <p:spPr>
+          <a:xfrm>
+            <a:off x="457200" y="713232"/>
+            <a:ext cx="11368735" cy="274320"/>
+          </a:xfrm>
+          <a:prstGeom prst="rect">
+            <a:avLst/>
+          </a:prstGeom>
+          <a:noFill/>
+          <a:ln/>
+        </p:spPr>
+        <p:txBody>
+          <a:bodyPr wrap="square" lIns="0" tIns="0" rIns="0" bIns="0" rtlCol="0" anchor="ctr"/>
+          <a:lstStyle/>
+          <a:p>
+            <a:pPr algn="r" indent="0" marL="0">
+              <a:buNone/>
+            </a:pPr>
+            <a:r>
+              <a:rPr lang="en-US" sz="1400" b="1" dirty="0">
+                <a:solidFill>
+                  <a:srgbClr val="1C3F6E"/>
+                </a:solidFill>
+                <a:latin typeface="Calibri" pitchFamily="34" charset="0"/>
+                <a:ea typeface="Calibri" pitchFamily="34" charset="-122"/>
+                <a:cs typeface="Calibri" pitchFamily="34" charset="-120"/>
+              </a:rPr>
               <a:t>BILINGUAL GAME</a:t>
             </a:r>
             <a:endParaRPr lang="en-US" sz="1400" dirty="0"/>
@@ -16292,7 +18198,7 @@
       </p:sp>
       <p:graphicFrame>
         <p:nvGraphicFramePr>
-          <p:cNvPr id="47" name="Table 0"/>
+          <p:cNvPr id="51" name="Table 0"/>
           <p:cNvGraphicFramePr>
             <a:graphicFrameLocks noGrp="1"/>
           </p:cNvGraphicFramePr>
@@ -17328,7 +19234,7 @@
             <a:pPr algn="ctr"/>
             <a:fld id="{F7021451-1387-4CA6-816F-3879F97B5CBC}" type="slidenum">
               <a:rPr b="1" lang="en-US"/>
-              <a:t>46</a:t>
+              <a:t>50</a:t>
             </a:fld>
             <a:endParaRPr lang="en-US"/>
           </a:p>
@@ -17342,9 +19248,9 @@
 </p:sld>
 </file>
 
-<file path=ppt/slides/slide47.xml><?xml version="1.0" encoding="utf-8"?>
+<file path=ppt/slides/slide51.xml><?xml version="1.0" encoding="utf-8"?>
 <p:sld xmlns:a="http://schemas.openxmlformats.org/drawingml/2006/main" xmlns:r="http://schemas.openxmlformats.org/officeDocument/2006/relationships" xmlns:p="http://schemas.openxmlformats.org/presentationml/2006/main">
-  <p:cSld name="Slide 47">
+  <p:cSld name="Slide 51">
     <p:spTree>
       <p:nvGrpSpPr>
         <p:cNvPr id="1" name=""/>
@@ -17439,7 +19345,7 @@
       </p:sp>
       <p:graphicFrame>
         <p:nvGraphicFramePr>
-          <p:cNvPr id="48" name="Table 0"/>
+          <p:cNvPr id="52" name="Table 0"/>
           <p:cNvGraphicFramePr>
             <a:graphicFrameLocks noGrp="1"/>
           </p:cNvGraphicFramePr>
@@ -18061,7 +19967,7 @@
             <a:pPr algn="ctr"/>
             <a:fld id="{F7021451-1387-4CA6-816F-3879F97B5CBC}" type="slidenum">
               <a:rPr b="1" lang="en-US"/>
-              <a:t>47</a:t>
+              <a:t>51</a:t>
             </a:fld>
             <a:endParaRPr lang="en-US"/>
           </a:p>
@@ -18075,9 +19981,9 @@
 </p:sld>
 </file>
 
-<file path=ppt/slides/slide48.xml><?xml version="1.0" encoding="utf-8"?>
+<file path=ppt/slides/slide52.xml><?xml version="1.0" encoding="utf-8"?>
 <p:sld xmlns:a="http://schemas.openxmlformats.org/drawingml/2006/main" xmlns:r="http://schemas.openxmlformats.org/officeDocument/2006/relationships" xmlns:p="http://schemas.openxmlformats.org/presentationml/2006/main">
-  <p:cSld name="Slide 48">
+  <p:cSld name="Slide 52">
     <p:spTree>
       <p:nvGrpSpPr>
         <p:cNvPr id="1" name=""/>
@@ -18172,7 +20078,7 @@
       </p:sp>
       <p:graphicFrame>
         <p:nvGraphicFramePr>
-          <p:cNvPr id="49" name="Table 0"/>
+          <p:cNvPr id="53" name="Table 0"/>
           <p:cNvGraphicFramePr>
             <a:graphicFrameLocks noGrp="1"/>
           </p:cNvGraphicFramePr>
@@ -18282,7 +20188,7 @@
                           <a:ea typeface="Calibri" pitchFamily="34" charset="-122"/>
                           <a:cs typeface="Calibri" pitchFamily="34" charset="-120"/>
                         </a:rPr>
-                        <a:t>DEFINITIONS; Shanty Settlements in Africa and in NICs; Ghettos and Slums in AICs.</a:t>
+                        <a:t>DEFINITIONS; Examples; Attempted Solutions; Characteristics.</a:t>
                       </a:r>
                       <a:endParaRPr lang="en-US" sz="1600" dirty="0">
                         <a:latin typeface="Calibri" charset="0"/>
@@ -18932,7 +20838,7 @@
             <a:pPr algn="ctr"/>
             <a:fld id="{F7021451-1387-4CA6-816F-3879F97B5CBC}" type="slidenum">
               <a:rPr b="1" lang="en-US"/>
-              <a:t>48</a:t>
+              <a:t>52</a:t>
             </a:fld>
             <a:endParaRPr lang="en-US"/>
           </a:p>
@@ -18946,9 +20852,9 @@
 </p:sld>
 </file>
 
-<file path=ppt/slides/slide49.xml><?xml version="1.0" encoding="utf-8"?>
+<file path=ppt/slides/slide53.xml><?xml version="1.0" encoding="utf-8"?>
 <p:sld xmlns:a="http://schemas.openxmlformats.org/drawingml/2006/main" xmlns:r="http://schemas.openxmlformats.org/officeDocument/2006/relationships" xmlns:p="http://schemas.openxmlformats.org/presentationml/2006/main">
-  <p:cSld name="Slide 49">
+  <p:cSld name="Slide 53">
     <p:spTree>
       <p:nvGrpSpPr>
         <p:cNvPr id="1" name=""/>
@@ -19257,7 +21163,7 @@
             <a:pPr algn="ctr"/>
             <a:fld id="{F7021451-1387-4CA6-816F-3879F97B5CBC}" type="slidenum">
               <a:rPr b="1" lang="en-US"/>
-              <a:t>49</a:t>
+              <a:t>53</a:t>
             </a:fld>
             <a:endParaRPr lang="en-US"/>
           </a:p>
@@ -19271,9 +21177,9 @@
 </p:sld>
 </file>
 
-<file path=ppt/slides/slide5.xml><?xml version="1.0" encoding="utf-8"?>
+<file path=ppt/slides/slide54.xml><?xml version="1.0" encoding="utf-8"?>
 <p:sld xmlns:a="http://schemas.openxmlformats.org/drawingml/2006/main" xmlns:r="http://schemas.openxmlformats.org/officeDocument/2006/relationships" xmlns:p="http://schemas.openxmlformats.org/presentationml/2006/main">
-  <p:cSld name="Slide 5">
+  <p:cSld name="Slide 54">
     <p:spTree>
       <p:nvGrpSpPr>
         <p:cNvPr id="1" name=""/>
@@ -19321,7 +21227,7 @@
                 <a:ea typeface="Calibri" pitchFamily="34" charset="-122"/>
                 <a:cs typeface="Calibri" pitchFamily="34" charset="-120"/>
               </a:rPr>
-              <a:t>HOMEWORK CORRECTION</a:t>
+              <a:t>REFERENCES</a:t>
             </a:r>
             <a:endParaRPr lang="en-US" sz="1400" dirty="0"/>
           </a:p>
@@ -19344,7 +21250,7 @@
         <p:spPr>
           <a:xfrm>
             <a:off x="0" y="658368"/>
-            <a:ext cx="5120640" cy="5833872"/>
+            <a:ext cx="3840480" cy="5833872"/>
           </a:xfrm>
           <a:prstGeom prst="rect">
             <a:avLst/>
@@ -19359,8 +21265,8 @@
         </p:nvSpPr>
         <p:spPr>
           <a:xfrm>
-            <a:off x="5349240" y="1005840"/>
-            <a:ext cx="6522415" cy="731520"/>
+            <a:off x="4069080" y="1005840"/>
+            <a:ext cx="7802575" cy="731520"/>
           </a:xfrm>
           <a:prstGeom prst="rect">
             <a:avLst/>
@@ -19386,7 +21292,7 @@
                 <a:ea typeface="Times New Roman" pitchFamily="34" charset="-122"/>
                 <a:cs typeface="Times New Roman" pitchFamily="34" charset="-120"/>
               </a:rPr>
-              <a:t>Correction: Possible Answer</a:t>
+              <a:t>References</a:t>
             </a:r>
             <a:endParaRPr lang="en-US" sz="3600" dirty="0"/>
           </a:p>
@@ -19400,8 +21306,8 @@
         </p:nvSpPr>
         <p:spPr>
           <a:xfrm>
-            <a:off x="5349240" y="1783080"/>
-            <a:ext cx="6522415" cy="4663440"/>
+            <a:off x="4069080" y="1783080"/>
+            <a:ext cx="7802575" cy="4663440"/>
           </a:xfrm>
           <a:prstGeom prst="rect">
             <a:avLst/>
@@ -19413,24 +21319,130 @@
           <a:bodyPr wrap="square" lIns="0" tIns="0" rIns="0" bIns="0" rtlCol="0" anchor="t"/>
           <a:lstStyle/>
           <a:p>
-            <a:pPr algn="l" indent="0" marL="0">
+            <a:pPr algn="l" marL="342900" indent="-342900">
               <a:spcAft>
                 <a:spcPts val="800"/>
               </a:spcAft>
-              <a:buNone/>
+              <a:buSzPct val="100000"/>
+              <a:buChar char="•"/>
             </a:pPr>
             <a:r>
-              <a:rPr lang="en-US" sz="4000" dirty="0">
+              <a:rPr lang="en-US" sz="1800" dirty="0">
                 <a:solidFill>
                   <a:srgbClr val="111111"/>
                 </a:solidFill>
-                <a:latin typeface="Times New Roman" pitchFamily="34" charset="0"/>
-                <a:ea typeface="Times New Roman" pitchFamily="34" charset="-122"/>
-                <a:cs typeface="Times New Roman" pitchFamily="34" charset="-120"/>
+                <a:latin typeface="Calibri" pitchFamily="34" charset="0"/>
+                <a:ea typeface="Calibri" pitchFamily="34" charset="-122"/>
+                <a:cs typeface="Calibri" pitchFamily="34" charset="-120"/>
               </a:rPr>
-              <a:t>Waste (bins and collection), floods (clean drains), traffic jams (new roads and public transport).</a:t>
-            </a:r>
-            <a:endParaRPr lang="en-US" sz="4000" dirty="0"/>
+              <a:t>Geography Syllabus, Forms I–V, MINESEC (2023) — Form 5, Module III: Management of Population Growth and Space Colonisation.</a:t>
+            </a:r>
+            <a:endParaRPr lang="en-US" sz="1800" dirty="0"/>
+          </a:p>
+          <a:p>
+            <a:pPr algn="l" marL="342900" indent="-342900">
+              <a:spcAft>
+                <a:spcPts val="800"/>
+              </a:spcAft>
+              <a:buSzPct val="100000"/>
+              <a:buChar char="•"/>
+            </a:pPr>
+            <a:r>
+              <a:rPr lang="en-US" sz="1800" dirty="0">
+                <a:solidFill>
+                  <a:srgbClr val="111111"/>
+                </a:solidFill>
+                <a:latin typeface="Calibri" pitchFamily="34" charset="0"/>
+                <a:ea typeface="Calibri" pitchFamily="34" charset="-122"/>
+                <a:cs typeface="Calibri" pitchFamily="34" charset="-120"/>
+              </a:rPr>
+              <a:t>Photo, Activity 1: “Mathare” by Book Aid International, CC BY-NC-ND 2.0, via Flickr (https://www.flickr.com/photos/45024905@N07/4135561707)</a:t>
+            </a:r>
+            <a:endParaRPr lang="en-US" sz="1800" dirty="0"/>
+          </a:p>
+          <a:p>
+            <a:pPr algn="l" marL="342900" indent="-342900">
+              <a:spcAft>
+                <a:spcPts val="800"/>
+              </a:spcAft>
+              <a:buSzPct val="100000"/>
+              <a:buChar char="•"/>
+            </a:pPr>
+            <a:r>
+              <a:rPr lang="en-US" sz="1800" dirty="0">
+                <a:solidFill>
+                  <a:srgbClr val="111111"/>
+                </a:solidFill>
+                <a:latin typeface="Calibri" pitchFamily="34" charset="0"/>
+                <a:ea typeface="Calibri" pitchFamily="34" charset="-122"/>
+                <a:cs typeface="Calibri" pitchFamily="34" charset="-120"/>
+              </a:rPr>
+              <a:t>Photo, Activity 2: “Village on the water Brunei.” by Bernard Spragg, CC0 1.0, via Flickr (https://www.flickr.com/photos/88123769@N02/15383937049)</a:t>
+            </a:r>
+            <a:endParaRPr lang="en-US" sz="1800" dirty="0"/>
+          </a:p>
+          <a:p>
+            <a:pPr algn="l" marL="342900" indent="-342900">
+              <a:spcAft>
+                <a:spcPts val="800"/>
+              </a:spcAft>
+              <a:buSzPct val="100000"/>
+              <a:buChar char="•"/>
+            </a:pPr>
+            <a:r>
+              <a:rPr lang="en-US" sz="1800" dirty="0">
+                <a:solidFill>
+                  <a:srgbClr val="111111"/>
+                </a:solidFill>
+                <a:latin typeface="Calibri" pitchFamily="34" charset="0"/>
+                <a:ea typeface="Calibri" pitchFamily="34" charset="-122"/>
+                <a:cs typeface="Calibri" pitchFamily="34" charset="-120"/>
+              </a:rPr>
+              <a:t>Photo, Activity 3: “La Paz” by cliff.hellis, CC BY-NC-ND 2.0, via Flickr (https://www.flickr.com/photos/30099537@N02/6348597083)</a:t>
+            </a:r>
+            <a:endParaRPr lang="en-US" sz="1800" dirty="0"/>
+          </a:p>
+          <a:p>
+            <a:pPr algn="l" marL="342900" indent="-342900">
+              <a:spcAft>
+                <a:spcPts val="800"/>
+              </a:spcAft>
+              <a:buSzPct val="100000"/>
+              <a:buChar char="•"/>
+            </a:pPr>
+            <a:r>
+              <a:rPr lang="en-US" sz="1800" dirty="0">
+                <a:solidFill>
+                  <a:srgbClr val="111111"/>
+                </a:solidFill>
+                <a:latin typeface="Calibri" pitchFamily="34" charset="0"/>
+                <a:ea typeface="Calibri" pitchFamily="34" charset="-122"/>
+                <a:cs typeface="Calibri" pitchFamily="34" charset="-120"/>
+              </a:rPr>
+              <a:t>Photo, Activity 4: “Old &amp; new: University Greenwich, The Queen's House &amp; London Docklands” by Bert Kaufmann, CC BY-NC 2.0, via Flickr (https://www.flickr.com/photos/22746515@N02/26742366958)</a:t>
+            </a:r>
+            <a:endParaRPr lang="en-US" sz="1800" dirty="0"/>
+          </a:p>
+          <a:p>
+            <a:pPr algn="l" marL="342900" indent="-342900">
+              <a:spcAft>
+                <a:spcPts val="800"/>
+              </a:spcAft>
+              <a:buSzPct val="100000"/>
+              <a:buChar char="•"/>
+            </a:pPr>
+            <a:r>
+              <a:rPr lang="en-US" sz="1800" dirty="0">
+                <a:solidFill>
+                  <a:srgbClr val="111111"/>
+                </a:solidFill>
+                <a:latin typeface="Calibri" pitchFamily="34" charset="0"/>
+                <a:ea typeface="Calibri" pitchFamily="34" charset="-122"/>
+                <a:cs typeface="Calibri" pitchFamily="34" charset="-120"/>
+              </a:rPr>
+              <a:t>Diagrams and animations: drawn for this lesson (Geography Department).</a:t>
+            </a:r>
+            <a:endParaRPr lang="en-US" sz="1800" dirty="0"/>
           </a:p>
         </p:txBody>
       </p:sp>
@@ -19476,332 +21488,7 @@
             <a:pPr algn="ctr"/>
             <a:fld id="{F7021451-1387-4CA6-816F-3879F97B5CBC}" type="slidenum">
               <a:rPr b="1" lang="en-US"/>
-              <a:t>5</a:t>
-            </a:fld>
-            <a:endParaRPr lang="en-US"/>
-          </a:p>
-        </p:txBody>
-      </p:sp>
-    </p:spTree>
-  </p:cSld>
-  <p:clrMapOvr>
-    <a:masterClrMapping/>
-  </p:clrMapOvr>
-</p:sld>
-</file>
-
-<file path=ppt/slides/slide50.xml><?xml version="1.0" encoding="utf-8"?>
-<p:sld xmlns:a="http://schemas.openxmlformats.org/drawingml/2006/main" xmlns:r="http://schemas.openxmlformats.org/officeDocument/2006/relationships" xmlns:p="http://schemas.openxmlformats.org/presentationml/2006/main">
-  <p:cSld name="Slide 50">
-    <p:spTree>
-      <p:nvGrpSpPr>
-        <p:cNvPr id="1" name=""/>
-        <p:cNvGrpSpPr/>
-        <p:nvPr/>
-      </p:nvGrpSpPr>
-      <p:grpSpPr>
-        <a:xfrm>
-          <a:off x="0" y="0"/>
-          <a:ext cx="0" cy="0"/>
-          <a:chOff x="0" y="0"/>
-          <a:chExt cx="0" cy="0"/>
-        </a:xfrm>
-      </p:grpSpPr>
-      <p:sp>
-        <p:nvSpPr>
-          <p:cNvPr id="2" name="Text 0"/>
-          <p:cNvSpPr/>
-          <p:nvPr/>
-        </p:nvSpPr>
-        <p:spPr>
-          <a:xfrm>
-            <a:off x="457200" y="713232"/>
-            <a:ext cx="11368735" cy="274320"/>
-          </a:xfrm>
-          <a:prstGeom prst="rect">
-            <a:avLst/>
-          </a:prstGeom>
-          <a:noFill/>
-          <a:ln/>
-        </p:spPr>
-        <p:txBody>
-          <a:bodyPr wrap="square" lIns="0" tIns="0" rIns="0" bIns="0" rtlCol="0" anchor="ctr"/>
-          <a:lstStyle/>
-          <a:p>
-            <a:pPr algn="r" indent="0" marL="0">
-              <a:buNone/>
-            </a:pPr>
-            <a:r>
-              <a:rPr lang="en-US" sz="1400" b="1" dirty="0">
-                <a:solidFill>
-                  <a:srgbClr val="1C3F6E"/>
-                </a:solidFill>
-                <a:latin typeface="Calibri" pitchFamily="34" charset="0"/>
-                <a:ea typeface="Calibri" pitchFamily="34" charset="-122"/>
-                <a:cs typeface="Calibri" pitchFamily="34" charset="-120"/>
-              </a:rPr>
-              <a:t>REFERENCES</a:t>
-            </a:r>
-            <a:endParaRPr lang="en-US" sz="1400" dirty="0"/>
-          </a:p>
-        </p:txBody>
-      </p:sp>
-      <p:pic>
-        <p:nvPicPr>
-          <p:cNvPr id="3" name="Image 0" descr="/home/claude/f4/img/minesec_sheet.png">    </p:cNvPr>
-          <p:cNvPicPr>
-            <a:picLocks noChangeAspect="1"/>
-          </p:cNvPicPr>
-          <p:nvPr/>
-        </p:nvPicPr>
-        <p:blipFill>
-          <a:blip r:embed="rId1"/>
-          <a:stretch>
-            <a:fillRect/>
-          </a:stretch>
-        </p:blipFill>
-        <p:spPr>
-          <a:xfrm>
-            <a:off x="0" y="658368"/>
-            <a:ext cx="3840480" cy="5833872"/>
-          </a:xfrm>
-          <a:prstGeom prst="rect">
-            <a:avLst/>
-          </a:prstGeom>
-        </p:spPr>
-      </p:pic>
-      <p:sp>
-        <p:nvSpPr>
-          <p:cNvPr id="4" name="Text 1"/>
-          <p:cNvSpPr/>
-          <p:nvPr/>
-        </p:nvSpPr>
-        <p:spPr>
-          <a:xfrm>
-            <a:off x="4069080" y="1005840"/>
-            <a:ext cx="7802575" cy="731520"/>
-          </a:xfrm>
-          <a:prstGeom prst="rect">
-            <a:avLst/>
-          </a:prstGeom>
-          <a:noFill/>
-          <a:ln/>
-        </p:spPr>
-        <p:txBody>
-          <a:bodyPr wrap="square" lIns="0" tIns="0" rIns="0" bIns="0" rtlCol="0" anchor="ctr">
-            <a:normAutofit/>
-          </a:bodyPr>
-          <a:lstStyle/>
-          <a:p>
-            <a:pPr algn="ctr" indent="0" marL="0">
-              <a:buNone/>
-            </a:pPr>
-            <a:r>
-              <a:rPr lang="en-US" sz="3600" b="1" dirty="0">
-                <a:solidFill>
-                  <a:srgbClr val="990011"/>
-                </a:solidFill>
-                <a:latin typeface="Times New Roman" pitchFamily="34" charset="0"/>
-                <a:ea typeface="Times New Roman" pitchFamily="34" charset="-122"/>
-                <a:cs typeface="Times New Roman" pitchFamily="34" charset="-120"/>
-              </a:rPr>
-              <a:t>References</a:t>
-            </a:r>
-            <a:endParaRPr lang="en-US" sz="3600" dirty="0"/>
-          </a:p>
-        </p:txBody>
-      </p:sp>
-      <p:sp>
-        <p:nvSpPr>
-          <p:cNvPr id="5" name="Text 2"/>
-          <p:cNvSpPr/>
-          <p:nvPr/>
-        </p:nvSpPr>
-        <p:spPr>
-          <a:xfrm>
-            <a:off x="4069080" y="1783080"/>
-            <a:ext cx="7802575" cy="4663440"/>
-          </a:xfrm>
-          <a:prstGeom prst="rect">
-            <a:avLst/>
-          </a:prstGeom>
-          <a:noFill/>
-          <a:ln/>
-        </p:spPr>
-        <p:txBody>
-          <a:bodyPr wrap="square" lIns="0" tIns="0" rIns="0" bIns="0" rtlCol="0" anchor="t"/>
-          <a:lstStyle/>
-          <a:p>
-            <a:pPr algn="l" marL="342900" indent="-342900">
-              <a:spcAft>
-                <a:spcPts val="800"/>
-              </a:spcAft>
-              <a:buSzPct val="100000"/>
-              <a:buChar char="•"/>
-            </a:pPr>
-            <a:r>
-              <a:rPr lang="en-US" sz="1800" dirty="0">
-                <a:solidFill>
-                  <a:srgbClr val="111111"/>
-                </a:solidFill>
-                <a:latin typeface="Calibri" pitchFamily="34" charset="0"/>
-                <a:ea typeface="Calibri" pitchFamily="34" charset="-122"/>
-                <a:cs typeface="Calibri" pitchFamily="34" charset="-120"/>
-              </a:rPr>
-              <a:t>Geography Syllabus, Forms I–V, MINESEC (2023) — Form 5, Module III: Management of Population Growth and Space Colonisation.</a:t>
-            </a:r>
-            <a:endParaRPr lang="en-US" sz="1800" dirty="0"/>
-          </a:p>
-          <a:p>
-            <a:pPr algn="l" marL="342900" indent="-342900">
-              <a:spcAft>
-                <a:spcPts val="800"/>
-              </a:spcAft>
-              <a:buSzPct val="100000"/>
-              <a:buChar char="•"/>
-            </a:pPr>
-            <a:r>
-              <a:rPr lang="en-US" sz="1800" dirty="0">
-                <a:solidFill>
-                  <a:srgbClr val="111111"/>
-                </a:solidFill>
-                <a:latin typeface="Calibri" pitchFamily="34" charset="0"/>
-                <a:ea typeface="Calibri" pitchFamily="34" charset="-122"/>
-                <a:cs typeface="Calibri" pitchFamily="34" charset="-120"/>
-              </a:rPr>
-              <a:t>Photo, Activity 1: “Mathare” by Book Aid International, CC BY-NC-ND 2.0, via Flickr (https://www.flickr.com/photos/45024905@N07/4135561707)</a:t>
-            </a:r>
-            <a:endParaRPr lang="en-US" sz="1800" dirty="0"/>
-          </a:p>
-          <a:p>
-            <a:pPr algn="l" marL="342900" indent="-342900">
-              <a:spcAft>
-                <a:spcPts val="800"/>
-              </a:spcAft>
-              <a:buSzPct val="100000"/>
-              <a:buChar char="•"/>
-            </a:pPr>
-            <a:r>
-              <a:rPr lang="en-US" sz="1800" dirty="0">
-                <a:solidFill>
-                  <a:srgbClr val="111111"/>
-                </a:solidFill>
-                <a:latin typeface="Calibri" pitchFamily="34" charset="0"/>
-                <a:ea typeface="Calibri" pitchFamily="34" charset="-122"/>
-                <a:cs typeface="Calibri" pitchFamily="34" charset="-120"/>
-              </a:rPr>
-              <a:t>Photo, Activity 2: “Village on the water Brunei.” by Bernard Spragg, CC0 1.0, via Flickr (https://www.flickr.com/photos/88123769@N02/15383937049)</a:t>
-            </a:r>
-            <a:endParaRPr lang="en-US" sz="1800" dirty="0"/>
-          </a:p>
-          <a:p>
-            <a:pPr algn="l" marL="342900" indent="-342900">
-              <a:spcAft>
-                <a:spcPts val="800"/>
-              </a:spcAft>
-              <a:buSzPct val="100000"/>
-              <a:buChar char="•"/>
-            </a:pPr>
-            <a:r>
-              <a:rPr lang="en-US" sz="1800" dirty="0">
-                <a:solidFill>
-                  <a:srgbClr val="111111"/>
-                </a:solidFill>
-                <a:latin typeface="Calibri" pitchFamily="34" charset="0"/>
-                <a:ea typeface="Calibri" pitchFamily="34" charset="-122"/>
-                <a:cs typeface="Calibri" pitchFamily="34" charset="-120"/>
-              </a:rPr>
-              <a:t>Photo, Activity 3: “La Paz” by cliff.hellis, CC BY-NC-ND 2.0, via Flickr (https://www.flickr.com/photos/30099537@N02/6348597083)</a:t>
-            </a:r>
-            <a:endParaRPr lang="en-US" sz="1800" dirty="0"/>
-          </a:p>
-          <a:p>
-            <a:pPr algn="l" marL="342900" indent="-342900">
-              <a:spcAft>
-                <a:spcPts val="800"/>
-              </a:spcAft>
-              <a:buSzPct val="100000"/>
-              <a:buChar char="•"/>
-            </a:pPr>
-            <a:r>
-              <a:rPr lang="en-US" sz="1800" dirty="0">
-                <a:solidFill>
-                  <a:srgbClr val="111111"/>
-                </a:solidFill>
-                <a:latin typeface="Calibri" pitchFamily="34" charset="0"/>
-                <a:ea typeface="Calibri" pitchFamily="34" charset="-122"/>
-                <a:cs typeface="Calibri" pitchFamily="34" charset="-120"/>
-              </a:rPr>
-              <a:t>Photo, Activity 4: “Old &amp; new: University Greenwich, The Queen's House &amp; London Docklands” by Bert Kaufmann, CC BY-NC 2.0, via Flickr (https://www.flickr.com/photos/22746515@N02/26742366958)</a:t>
-            </a:r>
-            <a:endParaRPr lang="en-US" sz="1800" dirty="0"/>
-          </a:p>
-          <a:p>
-            <a:pPr algn="l" marL="342900" indent="-342900">
-              <a:spcAft>
-                <a:spcPts val="800"/>
-              </a:spcAft>
-              <a:buSzPct val="100000"/>
-              <a:buChar char="•"/>
-            </a:pPr>
-            <a:r>
-              <a:rPr lang="en-US" sz="1800" dirty="0">
-                <a:solidFill>
-                  <a:srgbClr val="111111"/>
-                </a:solidFill>
-                <a:latin typeface="Calibri" pitchFamily="34" charset="0"/>
-                <a:ea typeface="Calibri" pitchFamily="34" charset="-122"/>
-                <a:cs typeface="Calibri" pitchFamily="34" charset="-120"/>
-              </a:rPr>
-              <a:t>Diagrams and animations: drawn for this lesson (Geography Department).</a:t>
-            </a:r>
-            <a:endParaRPr lang="en-US" sz="1800" dirty="0"/>
-          </a:p>
-        </p:txBody>
-      </p:sp>
-      <p:sp>
-        <p:nvSpPr>
-          <p:cNvPr id="25" name="Slide Number Placeholder 0"/>
-          <p:cNvSpPr>
-            <a:spLocks noGrp="1"/>
-          </p:cNvSpPr>
-          <p:nvPr>
-            <p:ph type="sldNum" sz="quarter" idx="4294967295"/>
-          </p:nvPr>
-        </p:nvSpPr>
-        <p:spPr>
-          <a:xfrm>
-            <a:off x="27432" y="91440"/>
-            <a:ext cx="585216" cy="475488"/>
-          </a:xfrm>
-          <a:prstGeom prst="rect">
-            <a:avLst/>
-          </a:prstGeom>
-          <a:extLst>
-            <a:ext uri="{C572A759-6A51-4108-AA02-DFA0A04FC94B}">
-              <ma14:wrappingTextBoxFlag xmlns:ma14="http://schemas.microsoft.com/office/mac/drawingml/2011/main" val="0"/>
-            </a:ext>
-          </a:extLst>
-        </p:spPr>
-        <p:txBody>
-          <a:bodyPr/>
-          <a:lstStyle>
-            <a:lvl1pPr>
-              <a:defRPr sz="2000">
-                <a:solidFill>
-                  <a:srgbClr val="FFFFFF"/>
-                </a:solidFill>
-                <a:latin typeface="Calibri"/>
-                <a:ea typeface="Calibri"/>
-                <a:cs typeface="Calibri"/>
-              </a:defRPr>
-            </a:lvl1pPr>
-          </a:lstStyle>
-          <a:p>
-            <a:pPr algn="ctr"/>
-            <a:fld id="{F7021451-1387-4CA6-816F-3879F97B5CBC}" type="slidenum">
-              <a:rPr b="1" lang="en-US"/>
-              <a:t>50</a:t>
+              <a:t>54</a:t>
             </a:fld>
             <a:endParaRPr lang="en-US"/>
           </a:p>
